--- a/slides/Weekly_Presentation_9.pptx
+++ b/slides/Weekly_Presentation_9.pptx
@@ -118,12 +118,12 @@
   <pc:docChgLst>
     <pc:chgData name="Ucchwas Talukder Utsha" userId="5d00aebb-9da7-4eec-b6b4-d48dd93a6925" providerId="ADAL" clId="{2696736A-EC31-4DCA-9887-52CDAA7E4777}"/>
     <pc:docChg chg="custSel modSld">
-      <pc:chgData name="Ucchwas Talukder Utsha" userId="5d00aebb-9da7-4eec-b6b4-d48dd93a6925" providerId="ADAL" clId="{2696736A-EC31-4DCA-9887-52CDAA7E4777}" dt="2026-08-25T21:53:13.656" v="3" actId="478"/>
+      <pc:chgData name="Ucchwas Talukder Utsha" userId="5d00aebb-9da7-4eec-b6b4-d48dd93a6925" providerId="ADAL" clId="{2696736A-EC31-4DCA-9887-52CDAA7E4777}" dt="2026-08-25T21:54:51.441" v="5" actId="20577"/>
       <pc:docMkLst>
         <pc:docMk/>
       </pc:docMkLst>
       <pc:sldChg chg="delSp modSp mod">
-        <pc:chgData name="Ucchwas Talukder Utsha" userId="5d00aebb-9da7-4eec-b6b4-d48dd93a6925" providerId="ADAL" clId="{2696736A-EC31-4DCA-9887-52CDAA7E4777}" dt="2026-08-25T21:53:13.656" v="3" actId="478"/>
+        <pc:chgData name="Ucchwas Talukder Utsha" userId="5d00aebb-9da7-4eec-b6b4-d48dd93a6925" providerId="ADAL" clId="{2696736A-EC31-4DCA-9887-52CDAA7E4777}" dt="2026-08-25T21:54:51.441" v="5" actId="20577"/>
         <pc:sldMkLst>
           <pc:docMk/>
           <pc:sldMk cId="3923863566" sldId="256"/>
@@ -158,6 +158,14 @@
             <pc:docMk/>
             <pc:sldMk cId="3923863566" sldId="256"/>
             <ac:spMk id="61" creationId="{351BC568-1D19-3F3F-48A7-F8C0BF9FE244}"/>
+          </ac:spMkLst>
+        </pc:spChg>
+        <pc:spChg chg="mod">
+          <ac:chgData name="Ucchwas Talukder Utsha" userId="5d00aebb-9da7-4eec-b6b4-d48dd93a6925" providerId="ADAL" clId="{2696736A-EC31-4DCA-9887-52CDAA7E4777}" dt="2026-08-25T21:54:51.441" v="5" actId="20577"/>
+          <ac:spMkLst>
+            <pc:docMk/>
+            <pc:sldMk cId="3923863566" sldId="256"/>
+            <ac:spMk id="84" creationId="{6971B7C5-9EE1-A42B-B4F8-BEA24E174D96}"/>
           </ac:spMkLst>
         </pc:spChg>
       </pc:sldChg>
@@ -7237,13 +7245,13 @@
           <a:p>
             <a:pPr algn="ctr"/>
             <a:r>
-              <a:rPr lang="en-US" sz="1600" b="1">
+              <a:rPr lang="en-US" sz="1600" b="1" dirty="0">
                 <a:solidFill>
                   <a:srgbClr val="FFFFFF"/>
                 </a:solidFill>
                 <a:latin typeface="Aptos" panose="020B0004020202020204" pitchFamily="34" charset="0"/>
               </a:rPr>
-              <a:t>All three help the LLM read a graph.  None of them returns a graph.</a:t>
+              <a:t>All three help the LLM read a graph.</a:t>
             </a:r>
           </a:p>
         </p:txBody>
@@ -7278,13 +7286,49 @@
           <a:lstStyle/>
           <a:p>
             <a:r>
-              <a:rPr lang="en-US" sz="1400">
+              <a:rPr lang="en-US" sz="1400" dirty="0">
                 <a:solidFill>
                   <a:srgbClr val="52657A"/>
                 </a:solidFill>
                 <a:latin typeface="Aptos" panose="020B0004020202020204" pitchFamily="34" charset="0"/>
               </a:rPr>
-              <a:t>Adjacency-row precedent (Yehudai et al., NeurIPS 2025): adjacency rows → Transformer → prediction; no pretrained LLM or graph output.</a:t>
+              <a:t>Adjacency-row precedent (</a:t>
+            </a:r>
+            <a:r>
+              <a:rPr lang="en-US" sz="1400" dirty="0" err="1">
+                <a:solidFill>
+                  <a:srgbClr val="52657A"/>
+                </a:solidFill>
+                <a:latin typeface="Aptos" panose="020B0004020202020204" pitchFamily="34" charset="0"/>
+              </a:rPr>
+              <a:t>Yehudai</a:t>
+            </a:r>
+            <a:r>
+              <a:rPr lang="en-US" sz="1400" dirty="0">
+                <a:solidFill>
+                  <a:srgbClr val="52657A"/>
+                </a:solidFill>
+                <a:latin typeface="Aptos" panose="020B0004020202020204" pitchFamily="34" charset="0"/>
+              </a:rPr>
+              <a:t> et al., </a:t>
+            </a:r>
+            <a:r>
+              <a:rPr lang="en-US" sz="1400" dirty="0" err="1">
+                <a:solidFill>
+                  <a:srgbClr val="52657A"/>
+                </a:solidFill>
+                <a:latin typeface="Aptos" panose="020B0004020202020204" pitchFamily="34" charset="0"/>
+              </a:rPr>
+              <a:t>NeurIPS</a:t>
+            </a:r>
+            <a:r>
+              <a:rPr lang="en-US" sz="1400" dirty="0">
+                <a:solidFill>
+                  <a:srgbClr val="52657A"/>
+                </a:solidFill>
+                <a:latin typeface="Aptos" panose="020B0004020202020204" pitchFamily="34" charset="0"/>
+              </a:rPr>
+              <a:t> 2025): adjacency rows → Transformer → prediction; no pretrained LLM or graph output.</a:t>
             </a:r>
           </a:p>
         </p:txBody>

--- a/slides/Weekly_Presentation_9.pptx
+++ b/slides/Weekly_Presentation_9.pptx
@@ -113,17 +113,25 @@
 </p:presentation>
 </file>
 
+<file path=ppt/revisionInfo.xml><?xml version="1.0" encoding="utf-8"?>
+<p1510:revInfo xmlns:a="http://schemas.openxmlformats.org/drawingml/2006/main" xmlns:r="http://schemas.openxmlformats.org/officeDocument/2006/relationships" xmlns:p1510="http://schemas.microsoft.com/office/powerpoint/2015/10/main">
+  <p1510:revLst>
+    <p1510:client id="{E6F43D3A-4D87-4439-A865-79C17B54165C}" v="1" dt="2026-08-25T21:58:34.533"/>
+  </p1510:revLst>
+</p1510:revInfo>
+</file>
+
 <file path=ppt/changesInfos/changesInfo1.xml><?xml version="1.0" encoding="utf-8"?>
 <pc:chgInfo xmlns:a="http://schemas.openxmlformats.org/drawingml/2006/main" xmlns:r="http://schemas.openxmlformats.org/officeDocument/2006/relationships" xmlns:ac="http://schemas.microsoft.com/office/drawing/2013/main/command" xmlns:pc="http://schemas.microsoft.com/office/powerpoint/2013/main/command">
   <pc:docChgLst>
     <pc:chgData name="Ucchwas Talukder Utsha" userId="5d00aebb-9da7-4eec-b6b4-d48dd93a6925" providerId="ADAL" clId="{2696736A-EC31-4DCA-9887-52CDAA7E4777}"/>
     <pc:docChg chg="custSel modSld">
-      <pc:chgData name="Ucchwas Talukder Utsha" userId="5d00aebb-9da7-4eec-b6b4-d48dd93a6925" providerId="ADAL" clId="{2696736A-EC31-4DCA-9887-52CDAA7E4777}" dt="2026-08-25T21:54:51.441" v="5" actId="20577"/>
+      <pc:chgData name="Ucchwas Talukder Utsha" userId="5d00aebb-9da7-4eec-b6b4-d48dd93a6925" providerId="ADAL" clId="{2696736A-EC31-4DCA-9887-52CDAA7E4777}" dt="2026-08-25T22:00:59.521" v="16" actId="478"/>
       <pc:docMkLst>
         <pc:docMk/>
       </pc:docMkLst>
       <pc:sldChg chg="delSp modSp mod">
-        <pc:chgData name="Ucchwas Talukder Utsha" userId="5d00aebb-9da7-4eec-b6b4-d48dd93a6925" providerId="ADAL" clId="{2696736A-EC31-4DCA-9887-52CDAA7E4777}" dt="2026-08-25T21:54:51.441" v="5" actId="20577"/>
+        <pc:chgData name="Ucchwas Talukder Utsha" userId="5d00aebb-9da7-4eec-b6b4-d48dd93a6925" providerId="ADAL" clId="{2696736A-EC31-4DCA-9887-52CDAA7E4777}" dt="2026-08-25T21:58:07.462" v="6" actId="478"/>
         <pc:sldMkLst>
           <pc:docMk/>
           <pc:sldMk cId="3923863566" sldId="256"/>
@@ -168,6 +176,189 @@
             <ac:spMk id="84" creationId="{6971B7C5-9EE1-A42B-B4F8-BEA24E174D96}"/>
           </ac:spMkLst>
         </pc:spChg>
+        <pc:spChg chg="del">
+          <ac:chgData name="Ucchwas Talukder Utsha" userId="5d00aebb-9da7-4eec-b6b4-d48dd93a6925" providerId="ADAL" clId="{2696736A-EC31-4DCA-9887-52CDAA7E4777}" dt="2026-08-25T21:58:07.462" v="6" actId="478"/>
+          <ac:spMkLst>
+            <pc:docMk/>
+            <pc:sldMk cId="3923863566" sldId="256"/>
+            <ac:spMk id="85" creationId="{287FEA57-0BB3-1A31-1194-2624815A7ECD}"/>
+          </ac:spMkLst>
+        </pc:spChg>
+      </pc:sldChg>
+      <pc:sldChg chg="delSp modSp mod">
+        <pc:chgData name="Ucchwas Talukder Utsha" userId="5d00aebb-9da7-4eec-b6b4-d48dd93a6925" providerId="ADAL" clId="{2696736A-EC31-4DCA-9887-52CDAA7E4777}" dt="2026-08-25T22:00:59.521" v="16" actId="478"/>
+        <pc:sldMkLst>
+          <pc:docMk/>
+          <pc:sldMk cId="479762732" sldId="257"/>
+        </pc:sldMkLst>
+        <pc:spChg chg="mod">
+          <ac:chgData name="Ucchwas Talukder Utsha" userId="5d00aebb-9da7-4eec-b6b4-d48dd93a6925" providerId="ADAL" clId="{2696736A-EC31-4DCA-9887-52CDAA7E4777}" dt="2026-08-25T21:58:39.476" v="9" actId="1076"/>
+          <ac:spMkLst>
+            <pc:docMk/>
+            <pc:sldMk cId="479762732" sldId="257"/>
+            <ac:spMk id="33" creationId="{C6E43D29-1B93-C687-DB46-6EC261D43C85}"/>
+          </ac:spMkLst>
+        </pc:spChg>
+        <pc:spChg chg="del">
+          <ac:chgData name="Ucchwas Talukder Utsha" userId="5d00aebb-9da7-4eec-b6b4-d48dd93a6925" providerId="ADAL" clId="{2696736A-EC31-4DCA-9887-52CDAA7E4777}" dt="2026-08-25T21:58:34.533" v="8" actId="478"/>
+          <ac:spMkLst>
+            <pc:docMk/>
+            <pc:sldMk cId="479762732" sldId="257"/>
+            <ac:spMk id="35" creationId="{64BEC20A-9916-2CC6-0E13-41C6463B4BE8}"/>
+          </ac:spMkLst>
+        </pc:spChg>
+        <pc:spChg chg="del">
+          <ac:chgData name="Ucchwas Talukder Utsha" userId="5d00aebb-9da7-4eec-b6b4-d48dd93a6925" providerId="ADAL" clId="{2696736A-EC31-4DCA-9887-52CDAA7E4777}" dt="2026-08-25T21:58:34.533" v="8" actId="478"/>
+          <ac:spMkLst>
+            <pc:docMk/>
+            <pc:sldMk cId="479762732" sldId="257"/>
+            <ac:spMk id="37" creationId="{2D4EDB54-C50E-B32F-9DBF-1E73EACCC662}"/>
+          </ac:spMkLst>
+        </pc:spChg>
+        <pc:spChg chg="del">
+          <ac:chgData name="Ucchwas Talukder Utsha" userId="5d00aebb-9da7-4eec-b6b4-d48dd93a6925" providerId="ADAL" clId="{2696736A-EC31-4DCA-9887-52CDAA7E4777}" dt="2026-08-25T21:58:34.533" v="8" actId="478"/>
+          <ac:spMkLst>
+            <pc:docMk/>
+            <pc:sldMk cId="479762732" sldId="257"/>
+            <ac:spMk id="38" creationId="{95DCD3AF-1C93-0728-E697-B2F52013C3FA}"/>
+          </ac:spMkLst>
+        </pc:spChg>
+        <pc:spChg chg="del">
+          <ac:chgData name="Ucchwas Talukder Utsha" userId="5d00aebb-9da7-4eec-b6b4-d48dd93a6925" providerId="ADAL" clId="{2696736A-EC31-4DCA-9887-52CDAA7E4777}" dt="2026-08-25T21:58:34.533" v="8" actId="478"/>
+          <ac:spMkLst>
+            <pc:docMk/>
+            <pc:sldMk cId="479762732" sldId="257"/>
+            <ac:spMk id="41" creationId="{E9C2A504-33C7-B780-079A-94D39D560A0B}"/>
+          </ac:spMkLst>
+        </pc:spChg>
+        <pc:spChg chg="del">
+          <ac:chgData name="Ucchwas Talukder Utsha" userId="5d00aebb-9da7-4eec-b6b4-d48dd93a6925" providerId="ADAL" clId="{2696736A-EC31-4DCA-9887-52CDAA7E4777}" dt="2026-08-25T21:58:34.533" v="8" actId="478"/>
+          <ac:spMkLst>
+            <pc:docMk/>
+            <pc:sldMk cId="479762732" sldId="257"/>
+            <ac:spMk id="42" creationId="{9C91651E-53C2-AB59-8AC3-70FDCFA401C0}"/>
+          </ac:spMkLst>
+        </pc:spChg>
+        <pc:spChg chg="del">
+          <ac:chgData name="Ucchwas Talukder Utsha" userId="5d00aebb-9da7-4eec-b6b4-d48dd93a6925" providerId="ADAL" clId="{2696736A-EC31-4DCA-9887-52CDAA7E4777}" dt="2026-08-25T21:58:34.533" v="8" actId="478"/>
+          <ac:spMkLst>
+            <pc:docMk/>
+            <pc:sldMk cId="479762732" sldId="257"/>
+            <ac:spMk id="45" creationId="{02F949D5-76FF-0D05-13A3-736813F782A5}"/>
+          </ac:spMkLst>
+        </pc:spChg>
+        <pc:spChg chg="del">
+          <ac:chgData name="Ucchwas Talukder Utsha" userId="5d00aebb-9da7-4eec-b6b4-d48dd93a6925" providerId="ADAL" clId="{2696736A-EC31-4DCA-9887-52CDAA7E4777}" dt="2026-08-25T21:58:34.533" v="8" actId="478"/>
+          <ac:spMkLst>
+            <pc:docMk/>
+            <pc:sldMk cId="479762732" sldId="257"/>
+            <ac:spMk id="46" creationId="{947F3C8A-C744-B0BF-CC75-32668E35381A}"/>
+          </ac:spMkLst>
+        </pc:spChg>
+        <pc:spChg chg="del">
+          <ac:chgData name="Ucchwas Talukder Utsha" userId="5d00aebb-9da7-4eec-b6b4-d48dd93a6925" providerId="ADAL" clId="{2696736A-EC31-4DCA-9887-52CDAA7E4777}" dt="2026-08-25T21:58:34.533" v="8" actId="478"/>
+          <ac:spMkLst>
+            <pc:docMk/>
+            <pc:sldMk cId="479762732" sldId="257"/>
+            <ac:spMk id="49" creationId="{BDA13F28-F917-58D6-CE8D-B470BEE41A7F}"/>
+          </ac:spMkLst>
+        </pc:spChg>
+        <pc:spChg chg="del">
+          <ac:chgData name="Ucchwas Talukder Utsha" userId="5d00aebb-9da7-4eec-b6b4-d48dd93a6925" providerId="ADAL" clId="{2696736A-EC31-4DCA-9887-52CDAA7E4777}" dt="2026-08-25T21:58:34.533" v="8" actId="478"/>
+          <ac:spMkLst>
+            <pc:docMk/>
+            <pc:sldMk cId="479762732" sldId="257"/>
+            <ac:spMk id="54" creationId="{4F658126-9315-4F64-CC35-5FF5E703E573}"/>
+          </ac:spMkLst>
+        </pc:spChg>
+        <pc:spChg chg="del">
+          <ac:chgData name="Ucchwas Talukder Utsha" userId="5d00aebb-9da7-4eec-b6b4-d48dd93a6925" providerId="ADAL" clId="{2696736A-EC31-4DCA-9887-52CDAA7E4777}" dt="2026-08-25T21:58:34.533" v="8" actId="478"/>
+          <ac:spMkLst>
+            <pc:docMk/>
+            <pc:sldMk cId="479762732" sldId="257"/>
+            <ac:spMk id="61" creationId="{B61EAA60-2FB5-1FC5-ECA0-A28C6343F3C2}"/>
+          </ac:spMkLst>
+        </pc:spChg>
+        <pc:spChg chg="del">
+          <ac:chgData name="Ucchwas Talukder Utsha" userId="5d00aebb-9da7-4eec-b6b4-d48dd93a6925" providerId="ADAL" clId="{2696736A-EC31-4DCA-9887-52CDAA7E4777}" dt="2026-08-25T21:58:28.923" v="7" actId="478"/>
+          <ac:spMkLst>
+            <pc:docMk/>
+            <pc:sldMk cId="479762732" sldId="257"/>
+            <ac:spMk id="63" creationId="{921A04D1-5EE7-A32F-5554-FD5C508C8CF7}"/>
+          </ac:spMkLst>
+        </pc:spChg>
+        <pc:spChg chg="mod">
+          <ac:chgData name="Ucchwas Talukder Utsha" userId="5d00aebb-9da7-4eec-b6b4-d48dd93a6925" providerId="ADAL" clId="{2696736A-EC31-4DCA-9887-52CDAA7E4777}" dt="2026-08-25T22:00:03.202" v="11" actId="1076"/>
+          <ac:spMkLst>
+            <pc:docMk/>
+            <pc:sldMk cId="479762732" sldId="257"/>
+            <ac:spMk id="64" creationId="{C400F7A6-ED6F-903E-5A34-A7598377B3CE}"/>
+          </ac:spMkLst>
+        </pc:spChg>
+        <pc:spChg chg="del">
+          <ac:chgData name="Ucchwas Talukder Utsha" userId="5d00aebb-9da7-4eec-b6b4-d48dd93a6925" providerId="ADAL" clId="{2696736A-EC31-4DCA-9887-52CDAA7E4777}" dt="2026-08-25T21:59:58.839" v="10" actId="478"/>
+          <ac:spMkLst>
+            <pc:docMk/>
+            <pc:sldMk cId="479762732" sldId="257"/>
+            <ac:spMk id="65" creationId="{728624C5-0658-22AF-2CF3-0FE05578DE09}"/>
+          </ac:spMkLst>
+        </pc:spChg>
+        <pc:spChg chg="mod">
+          <ac:chgData name="Ucchwas Talukder Utsha" userId="5d00aebb-9da7-4eec-b6b4-d48dd93a6925" providerId="ADAL" clId="{2696736A-EC31-4DCA-9887-52CDAA7E4777}" dt="2026-08-25T22:00:06.852" v="12" actId="1076"/>
+          <ac:spMkLst>
+            <pc:docMk/>
+            <pc:sldMk cId="479762732" sldId="257"/>
+            <ac:spMk id="66" creationId="{3851DF72-4C52-D851-98C5-D48F38DFEB16}"/>
+          </ac:spMkLst>
+        </pc:spChg>
+        <pc:spChg chg="mod">
+          <ac:chgData name="Ucchwas Talukder Utsha" userId="5d00aebb-9da7-4eec-b6b4-d48dd93a6925" providerId="ADAL" clId="{2696736A-EC31-4DCA-9887-52CDAA7E4777}" dt="2026-08-25T22:00:22.905" v="13" actId="20577"/>
+          <ac:spMkLst>
+            <pc:docMk/>
+            <pc:sldMk cId="479762732" sldId="257"/>
+            <ac:spMk id="67" creationId="{8BEFC2F4-C859-0C3A-5A15-8D8C0166A750}"/>
+          </ac:spMkLst>
+        </pc:spChg>
+        <pc:spChg chg="del">
+          <ac:chgData name="Ucchwas Talukder Utsha" userId="5d00aebb-9da7-4eec-b6b4-d48dd93a6925" providerId="ADAL" clId="{2696736A-EC31-4DCA-9887-52CDAA7E4777}" dt="2026-08-25T22:00:27.423" v="14" actId="478"/>
+          <ac:spMkLst>
+            <pc:docMk/>
+            <pc:sldMk cId="479762732" sldId="257"/>
+            <ac:spMk id="68" creationId="{86A32EFA-6319-4730-05B8-A6F790BE0847}"/>
+          </ac:spMkLst>
+        </pc:spChg>
+        <pc:spChg chg="del">
+          <ac:chgData name="Ucchwas Talukder Utsha" userId="5d00aebb-9da7-4eec-b6b4-d48dd93a6925" providerId="ADAL" clId="{2696736A-EC31-4DCA-9887-52CDAA7E4777}" dt="2026-08-25T22:00:27.423" v="14" actId="478"/>
+          <ac:spMkLst>
+            <pc:docMk/>
+            <pc:sldMk cId="479762732" sldId="257"/>
+            <ac:spMk id="69" creationId="{12E3C200-DF54-E13C-143E-BBAC5AFC9154}"/>
+          </ac:spMkLst>
+        </pc:spChg>
+        <pc:spChg chg="del">
+          <ac:chgData name="Ucchwas Talukder Utsha" userId="5d00aebb-9da7-4eec-b6b4-d48dd93a6925" providerId="ADAL" clId="{2696736A-EC31-4DCA-9887-52CDAA7E4777}" dt="2026-08-25T22:00:57.037" v="15" actId="478"/>
+          <ac:spMkLst>
+            <pc:docMk/>
+            <pc:sldMk cId="479762732" sldId="257"/>
+            <ac:spMk id="85" creationId="{D4AA52FA-CE8F-7561-474E-1D33666B0EF9}"/>
+          </ac:spMkLst>
+        </pc:spChg>
+        <pc:cxnChg chg="del">
+          <ac:chgData name="Ucchwas Talukder Utsha" userId="5d00aebb-9da7-4eec-b6b4-d48dd93a6925" providerId="ADAL" clId="{2696736A-EC31-4DCA-9887-52CDAA7E4777}" dt="2026-08-25T22:00:27.423" v="14" actId="478"/>
+          <ac:cxnSpMkLst>
+            <pc:docMk/>
+            <pc:sldMk cId="479762732" sldId="257"/>
+            <ac:cxnSpMk id="70" creationId="{294F1D3B-898B-13E7-FAED-C50A988C41A2}"/>
+          </ac:cxnSpMkLst>
+        </pc:cxnChg>
+        <pc:cxnChg chg="del">
+          <ac:chgData name="Ucchwas Talukder Utsha" userId="5d00aebb-9da7-4eec-b6b4-d48dd93a6925" providerId="ADAL" clId="{2696736A-EC31-4DCA-9887-52CDAA7E4777}" dt="2026-08-25T22:00:59.521" v="16" actId="478"/>
+          <ac:cxnSpMkLst>
+            <pc:docMk/>
+            <pc:sldMk cId="479762732" sldId="257"/>
+            <ac:cxnSpMk id="86" creationId="{7971C400-00B3-BA23-B97D-B88A28D69FDC}"/>
+          </ac:cxnSpMkLst>
+        </pc:cxnChg>
       </pc:sldChg>
     </pc:docChg>
   </pc:docChgLst>
@@ -7256,83 +7447,6 @@
           </a:p>
         </p:txBody>
       </p:sp>
-      <p:sp>
-        <p:nvSpPr>
-          <p:cNvPr id="85" name="AdjacencyFootnote">
-            <a:hlinkClick r:id="rId5"/>
-            <a:extLst>
-              <a:ext uri="{FF2B5EF4-FFF2-40B4-BE49-F238E27FC236}">
-                <a16:creationId xmlns:a16="http://schemas.microsoft.com/office/drawing/2014/main" id="{287FEA57-0BB3-1A31-1194-2624815A7ECD}"/>
-              </a:ext>
-            </a:extLst>
-          </p:cNvPr>
-          <p:cNvSpPr txBox="1"/>
-          <p:nvPr/>
-        </p:nvSpPr>
-        <p:spPr>
-          <a:xfrm>
-            <a:off x="508000" y="6172200"/>
-            <a:ext cx="11176000" cy="533400"/>
-          </a:xfrm>
-          <a:prstGeom prst="rect">
-            <a:avLst/>
-          </a:prstGeom>
-          <a:noFill/>
-        </p:spPr>
-        <p:txBody>
-          <a:bodyPr vert="horz" wrap="square" lIns="0" tIns="0" rIns="0" bIns="0" rtlCol="0" anchor="t">
-            <a:noAutofit/>
-          </a:bodyPr>
-          <a:lstStyle/>
-          <a:p>
-            <a:r>
-              <a:rPr lang="en-US" sz="1400" dirty="0">
-                <a:solidFill>
-                  <a:srgbClr val="52657A"/>
-                </a:solidFill>
-                <a:latin typeface="Aptos" panose="020B0004020202020204" pitchFamily="34" charset="0"/>
-              </a:rPr>
-              <a:t>Adjacency-row precedent (</a:t>
-            </a:r>
-            <a:r>
-              <a:rPr lang="en-US" sz="1400" dirty="0" err="1">
-                <a:solidFill>
-                  <a:srgbClr val="52657A"/>
-                </a:solidFill>
-                <a:latin typeface="Aptos" panose="020B0004020202020204" pitchFamily="34" charset="0"/>
-              </a:rPr>
-              <a:t>Yehudai</a:t>
-            </a:r>
-            <a:r>
-              <a:rPr lang="en-US" sz="1400" dirty="0">
-                <a:solidFill>
-                  <a:srgbClr val="52657A"/>
-                </a:solidFill>
-                <a:latin typeface="Aptos" panose="020B0004020202020204" pitchFamily="34" charset="0"/>
-              </a:rPr>
-              <a:t> et al., </a:t>
-            </a:r>
-            <a:r>
-              <a:rPr lang="en-US" sz="1400" dirty="0" err="1">
-                <a:solidFill>
-                  <a:srgbClr val="52657A"/>
-                </a:solidFill>
-                <a:latin typeface="Aptos" panose="020B0004020202020204" pitchFamily="34" charset="0"/>
-              </a:rPr>
-              <a:t>NeurIPS</a:t>
-            </a:r>
-            <a:r>
-              <a:rPr lang="en-US" sz="1400" dirty="0">
-                <a:solidFill>
-                  <a:srgbClr val="52657A"/>
-                </a:solidFill>
-                <a:latin typeface="Aptos" panose="020B0004020202020204" pitchFamily="34" charset="0"/>
-              </a:rPr>
-              <a:t> 2025): adjacency rows → Transformer → prediction; no pretrained LLM or graph output.</a:t>
-            </a:r>
-          </a:p>
-        </p:txBody>
-      </p:sp>
     </p:spTree>
     <p:extLst>
       <p:ext uri="{BB962C8B-B14F-4D97-AF65-F5344CB8AC3E}">
@@ -8854,7 +8968,7 @@
         </p:nvSpPr>
         <p:spPr>
           <a:xfrm>
-            <a:off x="2895600" y="1905000"/>
+            <a:off x="2832100" y="2565400"/>
             <a:ext cx="1600200" cy="571500"/>
           </a:xfrm>
           <a:prstGeom prst="rect">
@@ -8870,7 +8984,7 @@
           <a:p>
             <a:pPr algn="ctr"/>
             <a:r>
-              <a:rPr lang="en-US" b="1">
+              <a:rPr lang="en-US" b="1" dirty="0">
                 <a:solidFill>
                   <a:srgbClr val="172B4D"/>
                 </a:solidFill>
@@ -8884,1914 +8998,10 @@
       </p:sp>
       <p:sp>
         <p:nvSpPr>
-          <p:cNvPr id="34" name="Encoder-Matrix-R0-C0">
-            <a:extLst>
-              <a:ext uri="{FF2B5EF4-FFF2-40B4-BE49-F238E27FC236}">
-                <a16:creationId xmlns:a16="http://schemas.microsoft.com/office/drawing/2014/main" id="{F985138C-67D1-4757-CE1D-524E3AD0A283}"/>
-              </a:ext>
-            </a:extLst>
-          </p:cNvPr>
-          <p:cNvSpPr/>
-          <p:nvPr/>
-        </p:nvSpPr>
-        <p:spPr>
-          <a:xfrm>
-            <a:off x="2984500" y="2590800"/>
-            <a:ext cx="114300" cy="114300"/>
-          </a:xfrm>
-          <a:prstGeom prst="rect">
-            <a:avLst/>
-          </a:prstGeom>
-          <a:solidFill>
-            <a:srgbClr val="EEF2F6"/>
-          </a:solidFill>
-          <a:ln w="19050" cap="flat" cmpd="sng" algn="ctr">
-            <a:noFill/>
-            <a:prstDash val="solid"/>
-            <a:miter lim="800000"/>
-          </a:ln>
-          <a:effectLst/>
-          <a:extLst>
-            <a:ext uri="{91240B29-F687-4F45-9708-019B960494DF}">
-              <a14:hiddenLine xmlns:a14="http://schemas.microsoft.com/office/drawing/2010/main" w="19050" cap="flat" cmpd="sng" algn="ctr">
-                <a:solidFill>
-                  <a:schemeClr val="accent1">
-                    <a:shade val="15000"/>
-                  </a:schemeClr>
-                </a:solidFill>
-                <a:prstDash val="solid"/>
-                <a:miter lim="800000"/>
-              </a14:hiddenLine>
-            </a:ext>
-          </a:extLst>
-        </p:spPr>
-        <p:style>
-          <a:lnRef idx="2">
-            <a:schemeClr val="accent1">
-              <a:shade val="15000"/>
-            </a:schemeClr>
-          </a:lnRef>
-          <a:fillRef idx="1">
-            <a:schemeClr val="accent1"/>
-          </a:fillRef>
-          <a:effectRef idx="0">
-            <a:schemeClr val="accent1"/>
-          </a:effectRef>
-          <a:fontRef idx="minor">
-            <a:schemeClr val="lt1"/>
-          </a:fontRef>
-        </p:style>
-        <p:txBody>
-          <a:bodyPr rtlCol="0" anchor="ctr"/>
-          <a:lstStyle/>
-          <a:p>
-            <a:pPr algn="ctr"/>
-            <a:endParaRPr lang="en-US"/>
-          </a:p>
-        </p:txBody>
-      </p:sp>
-      <p:sp>
-        <p:nvSpPr>
-          <p:cNvPr id="35" name="Encoder-Matrix-R0-C1">
-            <a:extLst>
-              <a:ext uri="{FF2B5EF4-FFF2-40B4-BE49-F238E27FC236}">
-                <a16:creationId xmlns:a16="http://schemas.microsoft.com/office/drawing/2014/main" id="{64BEC20A-9916-2CC6-0E13-41C6463B4BE8}"/>
-              </a:ext>
-            </a:extLst>
-          </p:cNvPr>
-          <p:cNvSpPr/>
-          <p:nvPr/>
-        </p:nvSpPr>
-        <p:spPr>
-          <a:xfrm>
-            <a:off x="3111500" y="2590800"/>
-            <a:ext cx="114300" cy="114300"/>
-          </a:xfrm>
-          <a:prstGeom prst="rect">
-            <a:avLst/>
-          </a:prstGeom>
-          <a:solidFill>
-            <a:srgbClr val="2A9D8F"/>
-          </a:solidFill>
-          <a:ln w="19050" cap="flat" cmpd="sng" algn="ctr">
-            <a:noFill/>
-            <a:prstDash val="solid"/>
-            <a:miter lim="800000"/>
-          </a:ln>
-          <a:effectLst/>
-          <a:extLst>
-            <a:ext uri="{91240B29-F687-4F45-9708-019B960494DF}">
-              <a14:hiddenLine xmlns:a14="http://schemas.microsoft.com/office/drawing/2010/main" w="19050" cap="flat" cmpd="sng" algn="ctr">
-                <a:solidFill>
-                  <a:schemeClr val="accent1">
-                    <a:shade val="15000"/>
-                  </a:schemeClr>
-                </a:solidFill>
-                <a:prstDash val="solid"/>
-                <a:miter lim="800000"/>
-              </a14:hiddenLine>
-            </a:ext>
-          </a:extLst>
-        </p:spPr>
-        <p:style>
-          <a:lnRef idx="2">
-            <a:schemeClr val="accent1">
-              <a:shade val="15000"/>
-            </a:schemeClr>
-          </a:lnRef>
-          <a:fillRef idx="1">
-            <a:schemeClr val="accent1"/>
-          </a:fillRef>
-          <a:effectRef idx="0">
-            <a:schemeClr val="accent1"/>
-          </a:effectRef>
-          <a:fontRef idx="minor">
-            <a:schemeClr val="lt1"/>
-          </a:fontRef>
-        </p:style>
-        <p:txBody>
-          <a:bodyPr rtlCol="0" anchor="ctr"/>
-          <a:lstStyle/>
-          <a:p>
-            <a:pPr algn="ctr"/>
-            <a:endParaRPr lang="en-US"/>
-          </a:p>
-        </p:txBody>
-      </p:sp>
-      <p:sp>
-        <p:nvSpPr>
-          <p:cNvPr id="36" name="Encoder-Matrix-R0-C2">
-            <a:extLst>
-              <a:ext uri="{FF2B5EF4-FFF2-40B4-BE49-F238E27FC236}">
-                <a16:creationId xmlns:a16="http://schemas.microsoft.com/office/drawing/2014/main" id="{0492AA9D-649E-D443-5430-B2C014D888CD}"/>
-              </a:ext>
-            </a:extLst>
-          </p:cNvPr>
-          <p:cNvSpPr/>
-          <p:nvPr/>
-        </p:nvSpPr>
-        <p:spPr>
-          <a:xfrm>
-            <a:off x="3238500" y="2590800"/>
-            <a:ext cx="114300" cy="114300"/>
-          </a:xfrm>
-          <a:prstGeom prst="rect">
-            <a:avLst/>
-          </a:prstGeom>
-          <a:solidFill>
-            <a:srgbClr val="EEF2F6"/>
-          </a:solidFill>
-          <a:ln w="19050" cap="flat" cmpd="sng" algn="ctr">
-            <a:noFill/>
-            <a:prstDash val="solid"/>
-            <a:miter lim="800000"/>
-          </a:ln>
-          <a:effectLst/>
-          <a:extLst>
-            <a:ext uri="{91240B29-F687-4F45-9708-019B960494DF}">
-              <a14:hiddenLine xmlns:a14="http://schemas.microsoft.com/office/drawing/2010/main" w="19050" cap="flat" cmpd="sng" algn="ctr">
-                <a:solidFill>
-                  <a:schemeClr val="accent1">
-                    <a:shade val="15000"/>
-                  </a:schemeClr>
-                </a:solidFill>
-                <a:prstDash val="solid"/>
-                <a:miter lim="800000"/>
-              </a14:hiddenLine>
-            </a:ext>
-          </a:extLst>
-        </p:spPr>
-        <p:style>
-          <a:lnRef idx="2">
-            <a:schemeClr val="accent1">
-              <a:shade val="15000"/>
-            </a:schemeClr>
-          </a:lnRef>
-          <a:fillRef idx="1">
-            <a:schemeClr val="accent1"/>
-          </a:fillRef>
-          <a:effectRef idx="0">
-            <a:schemeClr val="accent1"/>
-          </a:effectRef>
-          <a:fontRef idx="minor">
-            <a:schemeClr val="lt1"/>
-          </a:fontRef>
-        </p:style>
-        <p:txBody>
-          <a:bodyPr rtlCol="0" anchor="ctr"/>
-          <a:lstStyle/>
-          <a:p>
-            <a:pPr algn="ctr"/>
-            <a:endParaRPr lang="en-US"/>
-          </a:p>
-        </p:txBody>
-      </p:sp>
-      <p:sp>
-        <p:nvSpPr>
-          <p:cNvPr id="37" name="Encoder-Matrix-R0-C3">
-            <a:extLst>
-              <a:ext uri="{FF2B5EF4-FFF2-40B4-BE49-F238E27FC236}">
-                <a16:creationId xmlns:a16="http://schemas.microsoft.com/office/drawing/2014/main" id="{2D4EDB54-C50E-B32F-9DBF-1E73EACCC662}"/>
-              </a:ext>
-            </a:extLst>
-          </p:cNvPr>
-          <p:cNvSpPr/>
-          <p:nvPr/>
-        </p:nvSpPr>
-        <p:spPr>
-          <a:xfrm>
-            <a:off x="3365500" y="2590800"/>
-            <a:ext cx="114300" cy="114300"/>
-          </a:xfrm>
-          <a:prstGeom prst="rect">
-            <a:avLst/>
-          </a:prstGeom>
-          <a:solidFill>
-            <a:srgbClr val="2A9D8F"/>
-          </a:solidFill>
-          <a:ln w="19050" cap="flat" cmpd="sng" algn="ctr">
-            <a:noFill/>
-            <a:prstDash val="solid"/>
-            <a:miter lim="800000"/>
-          </a:ln>
-          <a:effectLst/>
-          <a:extLst>
-            <a:ext uri="{91240B29-F687-4F45-9708-019B960494DF}">
-              <a14:hiddenLine xmlns:a14="http://schemas.microsoft.com/office/drawing/2010/main" w="19050" cap="flat" cmpd="sng" algn="ctr">
-                <a:solidFill>
-                  <a:schemeClr val="accent1">
-                    <a:shade val="15000"/>
-                  </a:schemeClr>
-                </a:solidFill>
-                <a:prstDash val="solid"/>
-                <a:miter lim="800000"/>
-              </a14:hiddenLine>
-            </a:ext>
-          </a:extLst>
-        </p:spPr>
-        <p:style>
-          <a:lnRef idx="2">
-            <a:schemeClr val="accent1">
-              <a:shade val="15000"/>
-            </a:schemeClr>
-          </a:lnRef>
-          <a:fillRef idx="1">
-            <a:schemeClr val="accent1"/>
-          </a:fillRef>
-          <a:effectRef idx="0">
-            <a:schemeClr val="accent1"/>
-          </a:effectRef>
-          <a:fontRef idx="minor">
-            <a:schemeClr val="lt1"/>
-          </a:fontRef>
-        </p:style>
-        <p:txBody>
-          <a:bodyPr rtlCol="0" anchor="ctr"/>
-          <a:lstStyle/>
-          <a:p>
-            <a:pPr algn="ctr"/>
-            <a:endParaRPr lang="en-US"/>
-          </a:p>
-        </p:txBody>
-      </p:sp>
-      <p:sp>
-        <p:nvSpPr>
-          <p:cNvPr id="38" name="Encoder-Matrix-R0-C4">
-            <a:extLst>
-              <a:ext uri="{FF2B5EF4-FFF2-40B4-BE49-F238E27FC236}">
-                <a16:creationId xmlns:a16="http://schemas.microsoft.com/office/drawing/2014/main" id="{95DCD3AF-1C93-0728-E697-B2F52013C3FA}"/>
-              </a:ext>
-            </a:extLst>
-          </p:cNvPr>
-          <p:cNvSpPr/>
-          <p:nvPr/>
-        </p:nvSpPr>
-        <p:spPr>
-          <a:xfrm>
-            <a:off x="3492500" y="2590800"/>
-            <a:ext cx="114300" cy="114300"/>
-          </a:xfrm>
-          <a:prstGeom prst="rect">
-            <a:avLst/>
-          </a:prstGeom>
-          <a:solidFill>
-            <a:srgbClr val="EEF2F6"/>
-          </a:solidFill>
-          <a:ln w="19050" cap="flat" cmpd="sng" algn="ctr">
-            <a:noFill/>
-            <a:prstDash val="solid"/>
-            <a:miter lim="800000"/>
-          </a:ln>
-          <a:effectLst/>
-          <a:extLst>
-            <a:ext uri="{91240B29-F687-4F45-9708-019B960494DF}">
-              <a14:hiddenLine xmlns:a14="http://schemas.microsoft.com/office/drawing/2010/main" w="19050" cap="flat" cmpd="sng" algn="ctr">
-                <a:solidFill>
-                  <a:schemeClr val="accent1">
-                    <a:shade val="15000"/>
-                  </a:schemeClr>
-                </a:solidFill>
-                <a:prstDash val="solid"/>
-                <a:miter lim="800000"/>
-              </a14:hiddenLine>
-            </a:ext>
-          </a:extLst>
-        </p:spPr>
-        <p:style>
-          <a:lnRef idx="2">
-            <a:schemeClr val="accent1">
-              <a:shade val="15000"/>
-            </a:schemeClr>
-          </a:lnRef>
-          <a:fillRef idx="1">
-            <a:schemeClr val="accent1"/>
-          </a:fillRef>
-          <a:effectRef idx="0">
-            <a:schemeClr val="accent1"/>
-          </a:effectRef>
-          <a:fontRef idx="minor">
-            <a:schemeClr val="lt1"/>
-          </a:fontRef>
-        </p:style>
-        <p:txBody>
-          <a:bodyPr rtlCol="0" anchor="ctr"/>
-          <a:lstStyle/>
-          <a:p>
-            <a:pPr algn="ctr"/>
-            <a:endParaRPr lang="en-US"/>
-          </a:p>
-        </p:txBody>
-      </p:sp>
-      <p:sp>
-        <p:nvSpPr>
-          <p:cNvPr id="39" name="Encoder-Matrix-R1-C0">
-            <a:extLst>
-              <a:ext uri="{FF2B5EF4-FFF2-40B4-BE49-F238E27FC236}">
-                <a16:creationId xmlns:a16="http://schemas.microsoft.com/office/drawing/2014/main" id="{8D39508B-EC99-ABF9-FB7F-97FEAF403466}"/>
-              </a:ext>
-            </a:extLst>
-          </p:cNvPr>
-          <p:cNvSpPr/>
-          <p:nvPr/>
-        </p:nvSpPr>
-        <p:spPr>
-          <a:xfrm>
-            <a:off x="2984500" y="2717800"/>
-            <a:ext cx="114300" cy="114300"/>
-          </a:xfrm>
-          <a:prstGeom prst="rect">
-            <a:avLst/>
-          </a:prstGeom>
-          <a:solidFill>
-            <a:srgbClr val="E76F51"/>
-          </a:solidFill>
-          <a:ln w="19050" cap="flat" cmpd="sng" algn="ctr">
-            <a:noFill/>
-            <a:prstDash val="solid"/>
-            <a:miter lim="800000"/>
-          </a:ln>
-          <a:effectLst/>
-          <a:extLst>
-            <a:ext uri="{91240B29-F687-4F45-9708-019B960494DF}">
-              <a14:hiddenLine xmlns:a14="http://schemas.microsoft.com/office/drawing/2010/main" w="19050" cap="flat" cmpd="sng" algn="ctr">
-                <a:solidFill>
-                  <a:schemeClr val="accent1">
-                    <a:shade val="15000"/>
-                  </a:schemeClr>
-                </a:solidFill>
-                <a:prstDash val="solid"/>
-                <a:miter lim="800000"/>
-              </a14:hiddenLine>
-            </a:ext>
-          </a:extLst>
-        </p:spPr>
-        <p:style>
-          <a:lnRef idx="2">
-            <a:schemeClr val="accent1">
-              <a:shade val="15000"/>
-            </a:schemeClr>
-          </a:lnRef>
-          <a:fillRef idx="1">
-            <a:schemeClr val="accent1"/>
-          </a:fillRef>
-          <a:effectRef idx="0">
-            <a:schemeClr val="accent1"/>
-          </a:effectRef>
-          <a:fontRef idx="minor">
-            <a:schemeClr val="lt1"/>
-          </a:fontRef>
-        </p:style>
-        <p:txBody>
-          <a:bodyPr rtlCol="0" anchor="ctr"/>
-          <a:lstStyle/>
-          <a:p>
-            <a:pPr algn="ctr"/>
-            <a:endParaRPr lang="en-US"/>
-          </a:p>
-        </p:txBody>
-      </p:sp>
-      <p:sp>
-        <p:nvSpPr>
-          <p:cNvPr id="40" name="Encoder-Matrix-R1-C1">
-            <a:extLst>
-              <a:ext uri="{FF2B5EF4-FFF2-40B4-BE49-F238E27FC236}">
-                <a16:creationId xmlns:a16="http://schemas.microsoft.com/office/drawing/2014/main" id="{FC6E33E6-D598-0B84-C9D1-F91FC053D58B}"/>
-              </a:ext>
-            </a:extLst>
-          </p:cNvPr>
-          <p:cNvSpPr/>
-          <p:nvPr/>
-        </p:nvSpPr>
-        <p:spPr>
-          <a:xfrm>
-            <a:off x="3111500" y="2717800"/>
-            <a:ext cx="114300" cy="114300"/>
-          </a:xfrm>
-          <a:prstGeom prst="rect">
-            <a:avLst/>
-          </a:prstGeom>
-          <a:solidFill>
-            <a:srgbClr val="FBEAE5"/>
-          </a:solidFill>
-          <a:ln w="19050" cap="flat" cmpd="sng" algn="ctr">
-            <a:noFill/>
-            <a:prstDash val="solid"/>
-            <a:miter lim="800000"/>
-          </a:ln>
-          <a:effectLst/>
-          <a:extLst>
-            <a:ext uri="{91240B29-F687-4F45-9708-019B960494DF}">
-              <a14:hiddenLine xmlns:a14="http://schemas.microsoft.com/office/drawing/2010/main" w="19050" cap="flat" cmpd="sng" algn="ctr">
-                <a:solidFill>
-                  <a:schemeClr val="accent1">
-                    <a:shade val="15000"/>
-                  </a:schemeClr>
-                </a:solidFill>
-                <a:prstDash val="solid"/>
-                <a:miter lim="800000"/>
-              </a14:hiddenLine>
-            </a:ext>
-          </a:extLst>
-        </p:spPr>
-        <p:style>
-          <a:lnRef idx="2">
-            <a:schemeClr val="accent1">
-              <a:shade val="15000"/>
-            </a:schemeClr>
-          </a:lnRef>
-          <a:fillRef idx="1">
-            <a:schemeClr val="accent1"/>
-          </a:fillRef>
-          <a:effectRef idx="0">
-            <a:schemeClr val="accent1"/>
-          </a:effectRef>
-          <a:fontRef idx="minor">
-            <a:schemeClr val="lt1"/>
-          </a:fontRef>
-        </p:style>
-        <p:txBody>
-          <a:bodyPr rtlCol="0" anchor="ctr"/>
-          <a:lstStyle/>
-          <a:p>
-            <a:pPr algn="ctr"/>
-            <a:endParaRPr lang="en-US"/>
-          </a:p>
-        </p:txBody>
-      </p:sp>
-      <p:sp>
-        <p:nvSpPr>
-          <p:cNvPr id="41" name="Encoder-Matrix-R1-C2">
-            <a:extLst>
-              <a:ext uri="{FF2B5EF4-FFF2-40B4-BE49-F238E27FC236}">
-                <a16:creationId xmlns:a16="http://schemas.microsoft.com/office/drawing/2014/main" id="{E9C2A504-33C7-B780-079A-94D39D560A0B}"/>
-              </a:ext>
-            </a:extLst>
-          </p:cNvPr>
-          <p:cNvSpPr/>
-          <p:nvPr/>
-        </p:nvSpPr>
-        <p:spPr>
-          <a:xfrm>
-            <a:off x="3238500" y="2717800"/>
-            <a:ext cx="114300" cy="114300"/>
-          </a:xfrm>
-          <a:prstGeom prst="rect">
-            <a:avLst/>
-          </a:prstGeom>
-          <a:solidFill>
-            <a:srgbClr val="E76F51"/>
-          </a:solidFill>
-          <a:ln w="19050" cap="flat" cmpd="sng" algn="ctr">
-            <a:noFill/>
-            <a:prstDash val="solid"/>
-            <a:miter lim="800000"/>
-          </a:ln>
-          <a:effectLst/>
-          <a:extLst>
-            <a:ext uri="{91240B29-F687-4F45-9708-019B960494DF}">
-              <a14:hiddenLine xmlns:a14="http://schemas.microsoft.com/office/drawing/2010/main" w="19050" cap="flat" cmpd="sng" algn="ctr">
-                <a:solidFill>
-                  <a:schemeClr val="accent1">
-                    <a:shade val="15000"/>
-                  </a:schemeClr>
-                </a:solidFill>
-                <a:prstDash val="solid"/>
-                <a:miter lim="800000"/>
-              </a14:hiddenLine>
-            </a:ext>
-          </a:extLst>
-        </p:spPr>
-        <p:style>
-          <a:lnRef idx="2">
-            <a:schemeClr val="accent1">
-              <a:shade val="15000"/>
-            </a:schemeClr>
-          </a:lnRef>
-          <a:fillRef idx="1">
-            <a:schemeClr val="accent1"/>
-          </a:fillRef>
-          <a:effectRef idx="0">
-            <a:schemeClr val="accent1"/>
-          </a:effectRef>
-          <a:fontRef idx="minor">
-            <a:schemeClr val="lt1"/>
-          </a:fontRef>
-        </p:style>
-        <p:txBody>
-          <a:bodyPr rtlCol="0" anchor="ctr"/>
-          <a:lstStyle/>
-          <a:p>
-            <a:pPr algn="ctr"/>
-            <a:endParaRPr lang="en-US"/>
-          </a:p>
-        </p:txBody>
-      </p:sp>
-      <p:sp>
-        <p:nvSpPr>
-          <p:cNvPr id="42" name="Encoder-Matrix-R1-C3">
-            <a:extLst>
-              <a:ext uri="{FF2B5EF4-FFF2-40B4-BE49-F238E27FC236}">
-                <a16:creationId xmlns:a16="http://schemas.microsoft.com/office/drawing/2014/main" id="{9C91651E-53C2-AB59-8AC3-70FDCFA401C0}"/>
-              </a:ext>
-            </a:extLst>
-          </p:cNvPr>
-          <p:cNvSpPr/>
-          <p:nvPr/>
-        </p:nvSpPr>
-        <p:spPr>
-          <a:xfrm>
-            <a:off x="3365500" y="2717800"/>
-            <a:ext cx="114300" cy="114300"/>
-          </a:xfrm>
-          <a:prstGeom prst="rect">
-            <a:avLst/>
-          </a:prstGeom>
-          <a:solidFill>
-            <a:srgbClr val="FBEAE5"/>
-          </a:solidFill>
-          <a:ln w="19050" cap="flat" cmpd="sng" algn="ctr">
-            <a:noFill/>
-            <a:prstDash val="solid"/>
-            <a:miter lim="800000"/>
-          </a:ln>
-          <a:effectLst/>
-          <a:extLst>
-            <a:ext uri="{91240B29-F687-4F45-9708-019B960494DF}">
-              <a14:hiddenLine xmlns:a14="http://schemas.microsoft.com/office/drawing/2010/main" w="19050" cap="flat" cmpd="sng" algn="ctr">
-                <a:solidFill>
-                  <a:schemeClr val="accent1">
-                    <a:shade val="15000"/>
-                  </a:schemeClr>
-                </a:solidFill>
-                <a:prstDash val="solid"/>
-                <a:miter lim="800000"/>
-              </a14:hiddenLine>
-            </a:ext>
-          </a:extLst>
-        </p:spPr>
-        <p:style>
-          <a:lnRef idx="2">
-            <a:schemeClr val="accent1">
-              <a:shade val="15000"/>
-            </a:schemeClr>
-          </a:lnRef>
-          <a:fillRef idx="1">
-            <a:schemeClr val="accent1"/>
-          </a:fillRef>
-          <a:effectRef idx="0">
-            <a:schemeClr val="accent1"/>
-          </a:effectRef>
-          <a:fontRef idx="minor">
-            <a:schemeClr val="lt1"/>
-          </a:fontRef>
-        </p:style>
-        <p:txBody>
-          <a:bodyPr rtlCol="0" anchor="ctr"/>
-          <a:lstStyle/>
-          <a:p>
-            <a:pPr algn="ctr"/>
-            <a:endParaRPr lang="en-US"/>
-          </a:p>
-        </p:txBody>
-      </p:sp>
-      <p:sp>
-        <p:nvSpPr>
-          <p:cNvPr id="43" name="Encoder-Matrix-R1-C4">
-            <a:extLst>
-              <a:ext uri="{FF2B5EF4-FFF2-40B4-BE49-F238E27FC236}">
-                <a16:creationId xmlns:a16="http://schemas.microsoft.com/office/drawing/2014/main" id="{32C4C7BC-5946-30D3-6662-C822FD1ADDB1}"/>
-              </a:ext>
-            </a:extLst>
-          </p:cNvPr>
-          <p:cNvSpPr/>
-          <p:nvPr/>
-        </p:nvSpPr>
-        <p:spPr>
-          <a:xfrm>
-            <a:off x="3492500" y="2717800"/>
-            <a:ext cx="114300" cy="114300"/>
-          </a:xfrm>
-          <a:prstGeom prst="rect">
-            <a:avLst/>
-          </a:prstGeom>
-          <a:solidFill>
-            <a:srgbClr val="E76F51"/>
-          </a:solidFill>
-          <a:ln w="19050" cap="flat" cmpd="sng" algn="ctr">
-            <a:noFill/>
-            <a:prstDash val="solid"/>
-            <a:miter lim="800000"/>
-          </a:ln>
-          <a:effectLst/>
-          <a:extLst>
-            <a:ext uri="{91240B29-F687-4F45-9708-019B960494DF}">
-              <a14:hiddenLine xmlns:a14="http://schemas.microsoft.com/office/drawing/2010/main" w="19050" cap="flat" cmpd="sng" algn="ctr">
-                <a:solidFill>
-                  <a:schemeClr val="accent1">
-                    <a:shade val="15000"/>
-                  </a:schemeClr>
-                </a:solidFill>
-                <a:prstDash val="solid"/>
-                <a:miter lim="800000"/>
-              </a14:hiddenLine>
-            </a:ext>
-          </a:extLst>
-        </p:spPr>
-        <p:style>
-          <a:lnRef idx="2">
-            <a:schemeClr val="accent1">
-              <a:shade val="15000"/>
-            </a:schemeClr>
-          </a:lnRef>
-          <a:fillRef idx="1">
-            <a:schemeClr val="accent1"/>
-          </a:fillRef>
-          <a:effectRef idx="0">
-            <a:schemeClr val="accent1"/>
-          </a:effectRef>
-          <a:fontRef idx="minor">
-            <a:schemeClr val="lt1"/>
-          </a:fontRef>
-        </p:style>
-        <p:txBody>
-          <a:bodyPr rtlCol="0" anchor="ctr"/>
-          <a:lstStyle/>
-          <a:p>
-            <a:pPr algn="ctr"/>
-            <a:endParaRPr lang="en-US"/>
-          </a:p>
-        </p:txBody>
-      </p:sp>
-      <p:sp>
-        <p:nvSpPr>
-          <p:cNvPr id="44" name="Encoder-Matrix-R2-C0">
-            <a:extLst>
-              <a:ext uri="{FF2B5EF4-FFF2-40B4-BE49-F238E27FC236}">
-                <a16:creationId xmlns:a16="http://schemas.microsoft.com/office/drawing/2014/main" id="{FC9911E0-0661-8C9C-240D-9969E0756601}"/>
-              </a:ext>
-            </a:extLst>
-          </p:cNvPr>
-          <p:cNvSpPr/>
-          <p:nvPr/>
-        </p:nvSpPr>
-        <p:spPr>
-          <a:xfrm>
-            <a:off x="2984500" y="2844800"/>
-            <a:ext cx="114300" cy="114300"/>
-          </a:xfrm>
-          <a:prstGeom prst="rect">
-            <a:avLst/>
-          </a:prstGeom>
-          <a:solidFill>
-            <a:srgbClr val="EEF2F6"/>
-          </a:solidFill>
-          <a:ln w="19050" cap="flat" cmpd="sng" algn="ctr">
-            <a:noFill/>
-            <a:prstDash val="solid"/>
-            <a:miter lim="800000"/>
-          </a:ln>
-          <a:effectLst/>
-          <a:extLst>
-            <a:ext uri="{91240B29-F687-4F45-9708-019B960494DF}">
-              <a14:hiddenLine xmlns:a14="http://schemas.microsoft.com/office/drawing/2010/main" w="19050" cap="flat" cmpd="sng" algn="ctr">
-                <a:solidFill>
-                  <a:schemeClr val="accent1">
-                    <a:shade val="15000"/>
-                  </a:schemeClr>
-                </a:solidFill>
-                <a:prstDash val="solid"/>
-                <a:miter lim="800000"/>
-              </a14:hiddenLine>
-            </a:ext>
-          </a:extLst>
-        </p:spPr>
-        <p:style>
-          <a:lnRef idx="2">
-            <a:schemeClr val="accent1">
-              <a:shade val="15000"/>
-            </a:schemeClr>
-          </a:lnRef>
-          <a:fillRef idx="1">
-            <a:schemeClr val="accent1"/>
-          </a:fillRef>
-          <a:effectRef idx="0">
-            <a:schemeClr val="accent1"/>
-          </a:effectRef>
-          <a:fontRef idx="minor">
-            <a:schemeClr val="lt1"/>
-          </a:fontRef>
-        </p:style>
-        <p:txBody>
-          <a:bodyPr rtlCol="0" anchor="ctr"/>
-          <a:lstStyle/>
-          <a:p>
-            <a:pPr algn="ctr"/>
-            <a:endParaRPr lang="en-US"/>
-          </a:p>
-        </p:txBody>
-      </p:sp>
-      <p:sp>
-        <p:nvSpPr>
-          <p:cNvPr id="45" name="Encoder-Matrix-R2-C1">
-            <a:extLst>
-              <a:ext uri="{FF2B5EF4-FFF2-40B4-BE49-F238E27FC236}">
-                <a16:creationId xmlns:a16="http://schemas.microsoft.com/office/drawing/2014/main" id="{02F949D5-76FF-0D05-13A3-736813F782A5}"/>
-              </a:ext>
-            </a:extLst>
-          </p:cNvPr>
-          <p:cNvSpPr/>
-          <p:nvPr/>
-        </p:nvSpPr>
-        <p:spPr>
-          <a:xfrm>
-            <a:off x="3111500" y="2844800"/>
-            <a:ext cx="114300" cy="114300"/>
-          </a:xfrm>
-          <a:prstGeom prst="rect">
-            <a:avLst/>
-          </a:prstGeom>
-          <a:solidFill>
-            <a:srgbClr val="2A9D8F"/>
-          </a:solidFill>
-          <a:ln w="19050" cap="flat" cmpd="sng" algn="ctr">
-            <a:noFill/>
-            <a:prstDash val="solid"/>
-            <a:miter lim="800000"/>
-          </a:ln>
-          <a:effectLst/>
-          <a:extLst>
-            <a:ext uri="{91240B29-F687-4F45-9708-019B960494DF}">
-              <a14:hiddenLine xmlns:a14="http://schemas.microsoft.com/office/drawing/2010/main" w="19050" cap="flat" cmpd="sng" algn="ctr">
-                <a:solidFill>
-                  <a:schemeClr val="accent1">
-                    <a:shade val="15000"/>
-                  </a:schemeClr>
-                </a:solidFill>
-                <a:prstDash val="solid"/>
-                <a:miter lim="800000"/>
-              </a14:hiddenLine>
-            </a:ext>
-          </a:extLst>
-        </p:spPr>
-        <p:style>
-          <a:lnRef idx="2">
-            <a:schemeClr val="accent1">
-              <a:shade val="15000"/>
-            </a:schemeClr>
-          </a:lnRef>
-          <a:fillRef idx="1">
-            <a:schemeClr val="accent1"/>
-          </a:fillRef>
-          <a:effectRef idx="0">
-            <a:schemeClr val="accent1"/>
-          </a:effectRef>
-          <a:fontRef idx="minor">
-            <a:schemeClr val="lt1"/>
-          </a:fontRef>
-        </p:style>
-        <p:txBody>
-          <a:bodyPr rtlCol="0" anchor="ctr"/>
-          <a:lstStyle/>
-          <a:p>
-            <a:pPr algn="ctr"/>
-            <a:endParaRPr lang="en-US"/>
-          </a:p>
-        </p:txBody>
-      </p:sp>
-      <p:sp>
-        <p:nvSpPr>
-          <p:cNvPr id="46" name="Encoder-Matrix-R2-C2">
-            <a:extLst>
-              <a:ext uri="{FF2B5EF4-FFF2-40B4-BE49-F238E27FC236}">
-                <a16:creationId xmlns:a16="http://schemas.microsoft.com/office/drawing/2014/main" id="{947F3C8A-C744-B0BF-CC75-32668E35381A}"/>
-              </a:ext>
-            </a:extLst>
-          </p:cNvPr>
-          <p:cNvSpPr/>
-          <p:nvPr/>
-        </p:nvSpPr>
-        <p:spPr>
-          <a:xfrm>
-            <a:off x="3238500" y="2844800"/>
-            <a:ext cx="114300" cy="114300"/>
-          </a:xfrm>
-          <a:prstGeom prst="rect">
-            <a:avLst/>
-          </a:prstGeom>
-          <a:solidFill>
-            <a:srgbClr val="EEF2F6"/>
-          </a:solidFill>
-          <a:ln w="19050" cap="flat" cmpd="sng" algn="ctr">
-            <a:noFill/>
-            <a:prstDash val="solid"/>
-            <a:miter lim="800000"/>
-          </a:ln>
-          <a:effectLst/>
-          <a:extLst>
-            <a:ext uri="{91240B29-F687-4F45-9708-019B960494DF}">
-              <a14:hiddenLine xmlns:a14="http://schemas.microsoft.com/office/drawing/2010/main" w="19050" cap="flat" cmpd="sng" algn="ctr">
-                <a:solidFill>
-                  <a:schemeClr val="accent1">
-                    <a:shade val="15000"/>
-                  </a:schemeClr>
-                </a:solidFill>
-                <a:prstDash val="solid"/>
-                <a:miter lim="800000"/>
-              </a14:hiddenLine>
-            </a:ext>
-          </a:extLst>
-        </p:spPr>
-        <p:style>
-          <a:lnRef idx="2">
-            <a:schemeClr val="accent1">
-              <a:shade val="15000"/>
-            </a:schemeClr>
-          </a:lnRef>
-          <a:fillRef idx="1">
-            <a:schemeClr val="accent1"/>
-          </a:fillRef>
-          <a:effectRef idx="0">
-            <a:schemeClr val="accent1"/>
-          </a:effectRef>
-          <a:fontRef idx="minor">
-            <a:schemeClr val="lt1"/>
-          </a:fontRef>
-        </p:style>
-        <p:txBody>
-          <a:bodyPr rtlCol="0" anchor="ctr"/>
-          <a:lstStyle/>
-          <a:p>
-            <a:pPr algn="ctr"/>
-            <a:endParaRPr lang="en-US"/>
-          </a:p>
-        </p:txBody>
-      </p:sp>
-      <p:sp>
-        <p:nvSpPr>
-          <p:cNvPr id="47" name="Encoder-Matrix-R2-C3">
-            <a:extLst>
-              <a:ext uri="{FF2B5EF4-FFF2-40B4-BE49-F238E27FC236}">
-                <a16:creationId xmlns:a16="http://schemas.microsoft.com/office/drawing/2014/main" id="{78A44FAF-4AB0-B75A-86B8-46486AEA7C36}"/>
-              </a:ext>
-            </a:extLst>
-          </p:cNvPr>
-          <p:cNvSpPr/>
-          <p:nvPr/>
-        </p:nvSpPr>
-        <p:spPr>
-          <a:xfrm>
-            <a:off x="3365500" y="2844800"/>
-            <a:ext cx="114300" cy="114300"/>
-          </a:xfrm>
-          <a:prstGeom prst="rect">
-            <a:avLst/>
-          </a:prstGeom>
-          <a:solidFill>
-            <a:srgbClr val="EEF2F6"/>
-          </a:solidFill>
-          <a:ln w="19050" cap="flat" cmpd="sng" algn="ctr">
-            <a:noFill/>
-            <a:prstDash val="solid"/>
-            <a:miter lim="800000"/>
-          </a:ln>
-          <a:effectLst/>
-          <a:extLst>
-            <a:ext uri="{91240B29-F687-4F45-9708-019B960494DF}">
-              <a14:hiddenLine xmlns:a14="http://schemas.microsoft.com/office/drawing/2010/main" w="19050" cap="flat" cmpd="sng" algn="ctr">
-                <a:solidFill>
-                  <a:schemeClr val="accent1">
-                    <a:shade val="15000"/>
-                  </a:schemeClr>
-                </a:solidFill>
-                <a:prstDash val="solid"/>
-                <a:miter lim="800000"/>
-              </a14:hiddenLine>
-            </a:ext>
-          </a:extLst>
-        </p:spPr>
-        <p:style>
-          <a:lnRef idx="2">
-            <a:schemeClr val="accent1">
-              <a:shade val="15000"/>
-            </a:schemeClr>
-          </a:lnRef>
-          <a:fillRef idx="1">
-            <a:schemeClr val="accent1"/>
-          </a:fillRef>
-          <a:effectRef idx="0">
-            <a:schemeClr val="accent1"/>
-          </a:effectRef>
-          <a:fontRef idx="minor">
-            <a:schemeClr val="lt1"/>
-          </a:fontRef>
-        </p:style>
-        <p:txBody>
-          <a:bodyPr rtlCol="0" anchor="ctr"/>
-          <a:lstStyle/>
-          <a:p>
-            <a:pPr algn="ctr"/>
-            <a:endParaRPr lang="en-US"/>
-          </a:p>
-        </p:txBody>
-      </p:sp>
-      <p:sp>
-        <p:nvSpPr>
-          <p:cNvPr id="48" name="Encoder-Matrix-R2-C4">
-            <a:extLst>
-              <a:ext uri="{FF2B5EF4-FFF2-40B4-BE49-F238E27FC236}">
-                <a16:creationId xmlns:a16="http://schemas.microsoft.com/office/drawing/2014/main" id="{2F58989D-318D-DE7D-D814-1D5348FCCDF3}"/>
-              </a:ext>
-            </a:extLst>
-          </p:cNvPr>
-          <p:cNvSpPr/>
-          <p:nvPr/>
-        </p:nvSpPr>
-        <p:spPr>
-          <a:xfrm>
-            <a:off x="3492500" y="2844800"/>
-            <a:ext cx="114300" cy="114300"/>
-          </a:xfrm>
-          <a:prstGeom prst="rect">
-            <a:avLst/>
-          </a:prstGeom>
-          <a:solidFill>
-            <a:srgbClr val="2A9D8F"/>
-          </a:solidFill>
-          <a:ln w="19050" cap="flat" cmpd="sng" algn="ctr">
-            <a:noFill/>
-            <a:prstDash val="solid"/>
-            <a:miter lim="800000"/>
-          </a:ln>
-          <a:effectLst/>
-          <a:extLst>
-            <a:ext uri="{91240B29-F687-4F45-9708-019B960494DF}">
-              <a14:hiddenLine xmlns:a14="http://schemas.microsoft.com/office/drawing/2010/main" w="19050" cap="flat" cmpd="sng" algn="ctr">
-                <a:solidFill>
-                  <a:schemeClr val="accent1">
-                    <a:shade val="15000"/>
-                  </a:schemeClr>
-                </a:solidFill>
-                <a:prstDash val="solid"/>
-                <a:miter lim="800000"/>
-              </a14:hiddenLine>
-            </a:ext>
-          </a:extLst>
-        </p:spPr>
-        <p:style>
-          <a:lnRef idx="2">
-            <a:schemeClr val="accent1">
-              <a:shade val="15000"/>
-            </a:schemeClr>
-          </a:lnRef>
-          <a:fillRef idx="1">
-            <a:schemeClr val="accent1"/>
-          </a:fillRef>
-          <a:effectRef idx="0">
-            <a:schemeClr val="accent1"/>
-          </a:effectRef>
-          <a:fontRef idx="minor">
-            <a:schemeClr val="lt1"/>
-          </a:fontRef>
-        </p:style>
-        <p:txBody>
-          <a:bodyPr rtlCol="0" anchor="ctr"/>
-          <a:lstStyle/>
-          <a:p>
-            <a:pPr algn="ctr"/>
-            <a:endParaRPr lang="en-US"/>
-          </a:p>
-        </p:txBody>
-      </p:sp>
-      <p:sp>
-        <p:nvSpPr>
-          <p:cNvPr id="49" name="Encoder-Matrix-R3-C0">
-            <a:extLst>
-              <a:ext uri="{FF2B5EF4-FFF2-40B4-BE49-F238E27FC236}">
-                <a16:creationId xmlns:a16="http://schemas.microsoft.com/office/drawing/2014/main" id="{BDA13F28-F917-58D6-CE8D-B470BEE41A7F}"/>
-              </a:ext>
-            </a:extLst>
-          </p:cNvPr>
-          <p:cNvSpPr/>
-          <p:nvPr/>
-        </p:nvSpPr>
-        <p:spPr>
-          <a:xfrm>
-            <a:off x="2984500" y="2971800"/>
-            <a:ext cx="114300" cy="114300"/>
-          </a:xfrm>
-          <a:prstGeom prst="rect">
-            <a:avLst/>
-          </a:prstGeom>
-          <a:solidFill>
-            <a:srgbClr val="2A9D8F"/>
-          </a:solidFill>
-          <a:ln w="19050" cap="flat" cmpd="sng" algn="ctr">
-            <a:noFill/>
-            <a:prstDash val="solid"/>
-            <a:miter lim="800000"/>
-          </a:ln>
-          <a:effectLst/>
-          <a:extLst>
-            <a:ext uri="{91240B29-F687-4F45-9708-019B960494DF}">
-              <a14:hiddenLine xmlns:a14="http://schemas.microsoft.com/office/drawing/2010/main" w="19050" cap="flat" cmpd="sng" algn="ctr">
-                <a:solidFill>
-                  <a:schemeClr val="accent1">
-                    <a:shade val="15000"/>
-                  </a:schemeClr>
-                </a:solidFill>
-                <a:prstDash val="solid"/>
-                <a:miter lim="800000"/>
-              </a14:hiddenLine>
-            </a:ext>
-          </a:extLst>
-        </p:spPr>
-        <p:style>
-          <a:lnRef idx="2">
-            <a:schemeClr val="accent1">
-              <a:shade val="15000"/>
-            </a:schemeClr>
-          </a:lnRef>
-          <a:fillRef idx="1">
-            <a:schemeClr val="accent1"/>
-          </a:fillRef>
-          <a:effectRef idx="0">
-            <a:schemeClr val="accent1"/>
-          </a:effectRef>
-          <a:fontRef idx="minor">
-            <a:schemeClr val="lt1"/>
-          </a:fontRef>
-        </p:style>
-        <p:txBody>
-          <a:bodyPr rtlCol="0" anchor="ctr"/>
-          <a:lstStyle/>
-          <a:p>
-            <a:pPr algn="ctr"/>
-            <a:endParaRPr lang="en-US"/>
-          </a:p>
-        </p:txBody>
-      </p:sp>
-      <p:sp>
-        <p:nvSpPr>
-          <p:cNvPr id="50" name="Encoder-Matrix-R3-C1">
-            <a:extLst>
-              <a:ext uri="{FF2B5EF4-FFF2-40B4-BE49-F238E27FC236}">
-                <a16:creationId xmlns:a16="http://schemas.microsoft.com/office/drawing/2014/main" id="{3A2A7E2B-ADA7-BC9F-8BBF-5DED2704CB03}"/>
-              </a:ext>
-            </a:extLst>
-          </p:cNvPr>
-          <p:cNvSpPr/>
-          <p:nvPr/>
-        </p:nvSpPr>
-        <p:spPr>
-          <a:xfrm>
-            <a:off x="3111500" y="2971800"/>
-            <a:ext cx="114300" cy="114300"/>
-          </a:xfrm>
-          <a:prstGeom prst="rect">
-            <a:avLst/>
-          </a:prstGeom>
-          <a:solidFill>
-            <a:srgbClr val="EEF2F6"/>
-          </a:solidFill>
-          <a:ln w="19050" cap="flat" cmpd="sng" algn="ctr">
-            <a:noFill/>
-            <a:prstDash val="solid"/>
-            <a:miter lim="800000"/>
-          </a:ln>
-          <a:effectLst/>
-          <a:extLst>
-            <a:ext uri="{91240B29-F687-4F45-9708-019B960494DF}">
-              <a14:hiddenLine xmlns:a14="http://schemas.microsoft.com/office/drawing/2010/main" w="19050" cap="flat" cmpd="sng" algn="ctr">
-                <a:solidFill>
-                  <a:schemeClr val="accent1">
-                    <a:shade val="15000"/>
-                  </a:schemeClr>
-                </a:solidFill>
-                <a:prstDash val="solid"/>
-                <a:miter lim="800000"/>
-              </a14:hiddenLine>
-            </a:ext>
-          </a:extLst>
-        </p:spPr>
-        <p:style>
-          <a:lnRef idx="2">
-            <a:schemeClr val="accent1">
-              <a:shade val="15000"/>
-            </a:schemeClr>
-          </a:lnRef>
-          <a:fillRef idx="1">
-            <a:schemeClr val="accent1"/>
-          </a:fillRef>
-          <a:effectRef idx="0">
-            <a:schemeClr val="accent1"/>
-          </a:effectRef>
-          <a:fontRef idx="minor">
-            <a:schemeClr val="lt1"/>
-          </a:fontRef>
-        </p:style>
-        <p:txBody>
-          <a:bodyPr rtlCol="0" anchor="ctr"/>
-          <a:lstStyle/>
-          <a:p>
-            <a:pPr algn="ctr"/>
-            <a:endParaRPr lang="en-US"/>
-          </a:p>
-        </p:txBody>
-      </p:sp>
-      <p:sp>
-        <p:nvSpPr>
-          <p:cNvPr id="51" name="Encoder-Matrix-R3-C2">
-            <a:extLst>
-              <a:ext uri="{FF2B5EF4-FFF2-40B4-BE49-F238E27FC236}">
-                <a16:creationId xmlns:a16="http://schemas.microsoft.com/office/drawing/2014/main" id="{71B2EF6B-7FC7-CF36-282A-EB75A02A1F6F}"/>
-              </a:ext>
-            </a:extLst>
-          </p:cNvPr>
-          <p:cNvSpPr/>
-          <p:nvPr/>
-        </p:nvSpPr>
-        <p:spPr>
-          <a:xfrm>
-            <a:off x="3238500" y="2971800"/>
-            <a:ext cx="114300" cy="114300"/>
-          </a:xfrm>
-          <a:prstGeom prst="rect">
-            <a:avLst/>
-          </a:prstGeom>
-          <a:solidFill>
-            <a:srgbClr val="EEF2F6"/>
-          </a:solidFill>
-          <a:ln w="19050" cap="flat" cmpd="sng" algn="ctr">
-            <a:noFill/>
-            <a:prstDash val="solid"/>
-            <a:miter lim="800000"/>
-          </a:ln>
-          <a:effectLst/>
-          <a:extLst>
-            <a:ext uri="{91240B29-F687-4F45-9708-019B960494DF}">
-              <a14:hiddenLine xmlns:a14="http://schemas.microsoft.com/office/drawing/2010/main" w="19050" cap="flat" cmpd="sng" algn="ctr">
-                <a:solidFill>
-                  <a:schemeClr val="accent1">
-                    <a:shade val="15000"/>
-                  </a:schemeClr>
-                </a:solidFill>
-                <a:prstDash val="solid"/>
-                <a:miter lim="800000"/>
-              </a14:hiddenLine>
-            </a:ext>
-          </a:extLst>
-        </p:spPr>
-        <p:style>
-          <a:lnRef idx="2">
-            <a:schemeClr val="accent1">
-              <a:shade val="15000"/>
-            </a:schemeClr>
-          </a:lnRef>
-          <a:fillRef idx="1">
-            <a:schemeClr val="accent1"/>
-          </a:fillRef>
-          <a:effectRef idx="0">
-            <a:schemeClr val="accent1"/>
-          </a:effectRef>
-          <a:fontRef idx="minor">
-            <a:schemeClr val="lt1"/>
-          </a:fontRef>
-        </p:style>
-        <p:txBody>
-          <a:bodyPr rtlCol="0" anchor="ctr"/>
-          <a:lstStyle/>
-          <a:p>
-            <a:pPr algn="ctr"/>
-            <a:endParaRPr lang="en-US"/>
-          </a:p>
-        </p:txBody>
-      </p:sp>
-      <p:sp>
-        <p:nvSpPr>
-          <p:cNvPr id="52" name="Encoder-Matrix-R3-C3">
-            <a:extLst>
-              <a:ext uri="{FF2B5EF4-FFF2-40B4-BE49-F238E27FC236}">
-                <a16:creationId xmlns:a16="http://schemas.microsoft.com/office/drawing/2014/main" id="{50C0E0F1-7947-2B9C-F7A0-DBAA85B2D9C3}"/>
-              </a:ext>
-            </a:extLst>
-          </p:cNvPr>
-          <p:cNvSpPr/>
-          <p:nvPr/>
-        </p:nvSpPr>
-        <p:spPr>
-          <a:xfrm>
-            <a:off x="3365500" y="2971800"/>
-            <a:ext cx="114300" cy="114300"/>
-          </a:xfrm>
-          <a:prstGeom prst="rect">
-            <a:avLst/>
-          </a:prstGeom>
-          <a:solidFill>
-            <a:srgbClr val="EEF2F6"/>
-          </a:solidFill>
-          <a:ln w="19050" cap="flat" cmpd="sng" algn="ctr">
-            <a:noFill/>
-            <a:prstDash val="solid"/>
-            <a:miter lim="800000"/>
-          </a:ln>
-          <a:effectLst/>
-          <a:extLst>
-            <a:ext uri="{91240B29-F687-4F45-9708-019B960494DF}">
-              <a14:hiddenLine xmlns:a14="http://schemas.microsoft.com/office/drawing/2010/main" w="19050" cap="flat" cmpd="sng" algn="ctr">
-                <a:solidFill>
-                  <a:schemeClr val="accent1">
-                    <a:shade val="15000"/>
-                  </a:schemeClr>
-                </a:solidFill>
-                <a:prstDash val="solid"/>
-                <a:miter lim="800000"/>
-              </a14:hiddenLine>
-            </a:ext>
-          </a:extLst>
-        </p:spPr>
-        <p:style>
-          <a:lnRef idx="2">
-            <a:schemeClr val="accent1">
-              <a:shade val="15000"/>
-            </a:schemeClr>
-          </a:lnRef>
-          <a:fillRef idx="1">
-            <a:schemeClr val="accent1"/>
-          </a:fillRef>
-          <a:effectRef idx="0">
-            <a:schemeClr val="accent1"/>
-          </a:effectRef>
-          <a:fontRef idx="minor">
-            <a:schemeClr val="lt1"/>
-          </a:fontRef>
-        </p:style>
-        <p:txBody>
-          <a:bodyPr rtlCol="0" anchor="ctr"/>
-          <a:lstStyle/>
-          <a:p>
-            <a:pPr algn="ctr"/>
-            <a:endParaRPr lang="en-US"/>
-          </a:p>
-        </p:txBody>
-      </p:sp>
-      <p:sp>
-        <p:nvSpPr>
-          <p:cNvPr id="53" name="Encoder-Matrix-R3-C4">
-            <a:extLst>
-              <a:ext uri="{FF2B5EF4-FFF2-40B4-BE49-F238E27FC236}">
-                <a16:creationId xmlns:a16="http://schemas.microsoft.com/office/drawing/2014/main" id="{FE6CD032-EF70-7EFC-2B01-E5C6433FFA25}"/>
-              </a:ext>
-            </a:extLst>
-          </p:cNvPr>
-          <p:cNvSpPr/>
-          <p:nvPr/>
-        </p:nvSpPr>
-        <p:spPr>
-          <a:xfrm>
-            <a:off x="3492500" y="2971800"/>
-            <a:ext cx="114300" cy="114300"/>
-          </a:xfrm>
-          <a:prstGeom prst="rect">
-            <a:avLst/>
-          </a:prstGeom>
-          <a:solidFill>
-            <a:srgbClr val="2A9D8F"/>
-          </a:solidFill>
-          <a:ln w="19050" cap="flat" cmpd="sng" algn="ctr">
-            <a:noFill/>
-            <a:prstDash val="solid"/>
-            <a:miter lim="800000"/>
-          </a:ln>
-          <a:effectLst/>
-          <a:extLst>
-            <a:ext uri="{91240B29-F687-4F45-9708-019B960494DF}">
-              <a14:hiddenLine xmlns:a14="http://schemas.microsoft.com/office/drawing/2010/main" w="19050" cap="flat" cmpd="sng" algn="ctr">
-                <a:solidFill>
-                  <a:schemeClr val="accent1">
-                    <a:shade val="15000"/>
-                  </a:schemeClr>
-                </a:solidFill>
-                <a:prstDash val="solid"/>
-                <a:miter lim="800000"/>
-              </a14:hiddenLine>
-            </a:ext>
-          </a:extLst>
-        </p:spPr>
-        <p:style>
-          <a:lnRef idx="2">
-            <a:schemeClr val="accent1">
-              <a:shade val="15000"/>
-            </a:schemeClr>
-          </a:lnRef>
-          <a:fillRef idx="1">
-            <a:schemeClr val="accent1"/>
-          </a:fillRef>
-          <a:effectRef idx="0">
-            <a:schemeClr val="accent1"/>
-          </a:effectRef>
-          <a:fontRef idx="minor">
-            <a:schemeClr val="lt1"/>
-          </a:fontRef>
-        </p:style>
-        <p:txBody>
-          <a:bodyPr rtlCol="0" anchor="ctr"/>
-          <a:lstStyle/>
-          <a:p>
-            <a:pPr algn="ctr"/>
-            <a:endParaRPr lang="en-US"/>
-          </a:p>
-        </p:txBody>
-      </p:sp>
-      <p:sp>
-        <p:nvSpPr>
-          <p:cNvPr id="54" name="Encoder-Matrix-R4-C0">
-            <a:extLst>
-              <a:ext uri="{FF2B5EF4-FFF2-40B4-BE49-F238E27FC236}">
-                <a16:creationId xmlns:a16="http://schemas.microsoft.com/office/drawing/2014/main" id="{4F658126-9315-4F64-CC35-5FF5E703E573}"/>
-              </a:ext>
-            </a:extLst>
-          </p:cNvPr>
-          <p:cNvSpPr/>
-          <p:nvPr/>
-        </p:nvSpPr>
-        <p:spPr>
-          <a:xfrm>
-            <a:off x="2984500" y="3098800"/>
-            <a:ext cx="114300" cy="114300"/>
-          </a:xfrm>
-          <a:prstGeom prst="rect">
-            <a:avLst/>
-          </a:prstGeom>
-          <a:solidFill>
-            <a:srgbClr val="EEF2F6"/>
-          </a:solidFill>
-          <a:ln w="19050" cap="flat" cmpd="sng" algn="ctr">
-            <a:noFill/>
-            <a:prstDash val="solid"/>
-            <a:miter lim="800000"/>
-          </a:ln>
-          <a:effectLst/>
-          <a:extLst>
-            <a:ext uri="{91240B29-F687-4F45-9708-019B960494DF}">
-              <a14:hiddenLine xmlns:a14="http://schemas.microsoft.com/office/drawing/2010/main" w="19050" cap="flat" cmpd="sng" algn="ctr">
-                <a:solidFill>
-                  <a:schemeClr val="accent1">
-                    <a:shade val="15000"/>
-                  </a:schemeClr>
-                </a:solidFill>
-                <a:prstDash val="solid"/>
-                <a:miter lim="800000"/>
-              </a14:hiddenLine>
-            </a:ext>
-          </a:extLst>
-        </p:spPr>
-        <p:style>
-          <a:lnRef idx="2">
-            <a:schemeClr val="accent1">
-              <a:shade val="15000"/>
-            </a:schemeClr>
-          </a:lnRef>
-          <a:fillRef idx="1">
-            <a:schemeClr val="accent1"/>
-          </a:fillRef>
-          <a:effectRef idx="0">
-            <a:schemeClr val="accent1"/>
-          </a:effectRef>
-          <a:fontRef idx="minor">
-            <a:schemeClr val="lt1"/>
-          </a:fontRef>
-        </p:style>
-        <p:txBody>
-          <a:bodyPr rtlCol="0" anchor="ctr"/>
-          <a:lstStyle/>
-          <a:p>
-            <a:pPr algn="ctr"/>
-            <a:endParaRPr lang="en-US"/>
-          </a:p>
-        </p:txBody>
-      </p:sp>
-      <p:sp>
-        <p:nvSpPr>
-          <p:cNvPr id="55" name="Encoder-Matrix-R4-C1">
-            <a:extLst>
-              <a:ext uri="{FF2B5EF4-FFF2-40B4-BE49-F238E27FC236}">
-                <a16:creationId xmlns:a16="http://schemas.microsoft.com/office/drawing/2014/main" id="{4AA061EF-5E66-5B09-0D2B-574242B1B6A9}"/>
-              </a:ext>
-            </a:extLst>
-          </p:cNvPr>
-          <p:cNvSpPr/>
-          <p:nvPr/>
-        </p:nvSpPr>
-        <p:spPr>
-          <a:xfrm>
-            <a:off x="3111500" y="3098800"/>
-            <a:ext cx="114300" cy="114300"/>
-          </a:xfrm>
-          <a:prstGeom prst="rect">
-            <a:avLst/>
-          </a:prstGeom>
-          <a:solidFill>
-            <a:srgbClr val="2A9D8F"/>
-          </a:solidFill>
-          <a:ln w="19050" cap="flat" cmpd="sng" algn="ctr">
-            <a:noFill/>
-            <a:prstDash val="solid"/>
-            <a:miter lim="800000"/>
-          </a:ln>
-          <a:effectLst/>
-          <a:extLst>
-            <a:ext uri="{91240B29-F687-4F45-9708-019B960494DF}">
-              <a14:hiddenLine xmlns:a14="http://schemas.microsoft.com/office/drawing/2010/main" w="19050" cap="flat" cmpd="sng" algn="ctr">
-                <a:solidFill>
-                  <a:schemeClr val="accent1">
-                    <a:shade val="15000"/>
-                  </a:schemeClr>
-                </a:solidFill>
-                <a:prstDash val="solid"/>
-                <a:miter lim="800000"/>
-              </a14:hiddenLine>
-            </a:ext>
-          </a:extLst>
-        </p:spPr>
-        <p:style>
-          <a:lnRef idx="2">
-            <a:schemeClr val="accent1">
-              <a:shade val="15000"/>
-            </a:schemeClr>
-          </a:lnRef>
-          <a:fillRef idx="1">
-            <a:schemeClr val="accent1"/>
-          </a:fillRef>
-          <a:effectRef idx="0">
-            <a:schemeClr val="accent1"/>
-          </a:effectRef>
-          <a:fontRef idx="minor">
-            <a:schemeClr val="lt1"/>
-          </a:fontRef>
-        </p:style>
-        <p:txBody>
-          <a:bodyPr rtlCol="0" anchor="ctr"/>
-          <a:lstStyle/>
-          <a:p>
-            <a:pPr algn="ctr"/>
-            <a:endParaRPr lang="en-US"/>
-          </a:p>
-        </p:txBody>
-      </p:sp>
-      <p:sp>
-        <p:nvSpPr>
-          <p:cNvPr id="56" name="Encoder-Matrix-R4-C2">
-            <a:extLst>
-              <a:ext uri="{FF2B5EF4-FFF2-40B4-BE49-F238E27FC236}">
-                <a16:creationId xmlns:a16="http://schemas.microsoft.com/office/drawing/2014/main" id="{5C774D72-A649-3466-22D4-D4464B0C3294}"/>
-              </a:ext>
-            </a:extLst>
-          </p:cNvPr>
-          <p:cNvSpPr/>
-          <p:nvPr/>
-        </p:nvSpPr>
-        <p:spPr>
-          <a:xfrm>
-            <a:off x="3238500" y="3098800"/>
-            <a:ext cx="114300" cy="114300"/>
-          </a:xfrm>
-          <a:prstGeom prst="rect">
-            <a:avLst/>
-          </a:prstGeom>
-          <a:solidFill>
-            <a:srgbClr val="2A9D8F"/>
-          </a:solidFill>
-          <a:ln w="19050" cap="flat" cmpd="sng" algn="ctr">
-            <a:noFill/>
-            <a:prstDash val="solid"/>
-            <a:miter lim="800000"/>
-          </a:ln>
-          <a:effectLst/>
-          <a:extLst>
-            <a:ext uri="{91240B29-F687-4F45-9708-019B960494DF}">
-              <a14:hiddenLine xmlns:a14="http://schemas.microsoft.com/office/drawing/2010/main" w="19050" cap="flat" cmpd="sng" algn="ctr">
-                <a:solidFill>
-                  <a:schemeClr val="accent1">
-                    <a:shade val="15000"/>
-                  </a:schemeClr>
-                </a:solidFill>
-                <a:prstDash val="solid"/>
-                <a:miter lim="800000"/>
-              </a14:hiddenLine>
-            </a:ext>
-          </a:extLst>
-        </p:spPr>
-        <p:style>
-          <a:lnRef idx="2">
-            <a:schemeClr val="accent1">
-              <a:shade val="15000"/>
-            </a:schemeClr>
-          </a:lnRef>
-          <a:fillRef idx="1">
-            <a:schemeClr val="accent1"/>
-          </a:fillRef>
-          <a:effectRef idx="0">
-            <a:schemeClr val="accent1"/>
-          </a:effectRef>
-          <a:fontRef idx="minor">
-            <a:schemeClr val="lt1"/>
-          </a:fontRef>
-        </p:style>
-        <p:txBody>
-          <a:bodyPr rtlCol="0" anchor="ctr"/>
-          <a:lstStyle/>
-          <a:p>
-            <a:pPr algn="ctr"/>
-            <a:endParaRPr lang="en-US"/>
-          </a:p>
-        </p:txBody>
-      </p:sp>
-      <p:sp>
-        <p:nvSpPr>
-          <p:cNvPr id="57" name="Encoder-Matrix-R4-C3">
-            <a:extLst>
-              <a:ext uri="{FF2B5EF4-FFF2-40B4-BE49-F238E27FC236}">
-                <a16:creationId xmlns:a16="http://schemas.microsoft.com/office/drawing/2014/main" id="{37B9912F-53E1-3D0A-3B74-88CB0DA6557D}"/>
-              </a:ext>
-            </a:extLst>
-          </p:cNvPr>
-          <p:cNvSpPr/>
-          <p:nvPr/>
-        </p:nvSpPr>
-        <p:spPr>
-          <a:xfrm>
-            <a:off x="3365500" y="3098800"/>
-            <a:ext cx="114300" cy="114300"/>
-          </a:xfrm>
-          <a:prstGeom prst="rect">
-            <a:avLst/>
-          </a:prstGeom>
-          <a:solidFill>
-            <a:srgbClr val="2A9D8F"/>
-          </a:solidFill>
-          <a:ln w="19050" cap="flat" cmpd="sng" algn="ctr">
-            <a:noFill/>
-            <a:prstDash val="solid"/>
-            <a:miter lim="800000"/>
-          </a:ln>
-          <a:effectLst/>
-          <a:extLst>
-            <a:ext uri="{91240B29-F687-4F45-9708-019B960494DF}">
-              <a14:hiddenLine xmlns:a14="http://schemas.microsoft.com/office/drawing/2010/main" w="19050" cap="flat" cmpd="sng" algn="ctr">
-                <a:solidFill>
-                  <a:schemeClr val="accent1">
-                    <a:shade val="15000"/>
-                  </a:schemeClr>
-                </a:solidFill>
-                <a:prstDash val="solid"/>
-                <a:miter lim="800000"/>
-              </a14:hiddenLine>
-            </a:ext>
-          </a:extLst>
-        </p:spPr>
-        <p:style>
-          <a:lnRef idx="2">
-            <a:schemeClr val="accent1">
-              <a:shade val="15000"/>
-            </a:schemeClr>
-          </a:lnRef>
-          <a:fillRef idx="1">
-            <a:schemeClr val="accent1"/>
-          </a:fillRef>
-          <a:effectRef idx="0">
-            <a:schemeClr val="accent1"/>
-          </a:effectRef>
-          <a:fontRef idx="minor">
-            <a:schemeClr val="lt1"/>
-          </a:fontRef>
-        </p:style>
-        <p:txBody>
-          <a:bodyPr rtlCol="0" anchor="ctr"/>
-          <a:lstStyle/>
-          <a:p>
-            <a:pPr algn="ctr"/>
-            <a:endParaRPr lang="en-US"/>
-          </a:p>
-        </p:txBody>
-      </p:sp>
-      <p:sp>
-        <p:nvSpPr>
-          <p:cNvPr id="58" name="Encoder-Matrix-R4-C4">
-            <a:extLst>
-              <a:ext uri="{FF2B5EF4-FFF2-40B4-BE49-F238E27FC236}">
-                <a16:creationId xmlns:a16="http://schemas.microsoft.com/office/drawing/2014/main" id="{6DB16A3A-392C-A615-9AA1-6A160441D0D0}"/>
-              </a:ext>
-            </a:extLst>
-          </p:cNvPr>
-          <p:cNvSpPr/>
-          <p:nvPr/>
-        </p:nvSpPr>
-        <p:spPr>
-          <a:xfrm>
-            <a:off x="3492500" y="3098800"/>
-            <a:ext cx="114300" cy="114300"/>
-          </a:xfrm>
-          <a:prstGeom prst="rect">
-            <a:avLst/>
-          </a:prstGeom>
-          <a:solidFill>
-            <a:srgbClr val="EEF2F6"/>
-          </a:solidFill>
-          <a:ln w="19050" cap="flat" cmpd="sng" algn="ctr">
-            <a:noFill/>
-            <a:prstDash val="solid"/>
-            <a:miter lim="800000"/>
-          </a:ln>
-          <a:effectLst/>
-          <a:extLst>
-            <a:ext uri="{91240B29-F687-4F45-9708-019B960494DF}">
-              <a14:hiddenLine xmlns:a14="http://schemas.microsoft.com/office/drawing/2010/main" w="19050" cap="flat" cmpd="sng" algn="ctr">
-                <a:solidFill>
-                  <a:schemeClr val="accent1">
-                    <a:shade val="15000"/>
-                  </a:schemeClr>
-                </a:solidFill>
-                <a:prstDash val="solid"/>
-                <a:miter lim="800000"/>
-              </a14:hiddenLine>
-            </a:ext>
-          </a:extLst>
-        </p:spPr>
-        <p:style>
-          <a:lnRef idx="2">
-            <a:schemeClr val="accent1">
-              <a:shade val="15000"/>
-            </a:schemeClr>
-          </a:lnRef>
-          <a:fillRef idx="1">
-            <a:schemeClr val="accent1"/>
-          </a:fillRef>
-          <a:effectRef idx="0">
-            <a:schemeClr val="accent1"/>
-          </a:effectRef>
-          <a:fontRef idx="minor">
-            <a:schemeClr val="lt1"/>
-          </a:fontRef>
-        </p:style>
-        <p:txBody>
-          <a:bodyPr rtlCol="0" anchor="ctr"/>
-          <a:lstStyle/>
-          <a:p>
-            <a:pPr algn="ctr"/>
-            <a:endParaRPr lang="en-US"/>
-          </a:p>
-        </p:txBody>
-      </p:sp>
-      <p:cxnSp>
-        <p:nvCxnSpPr>
-          <p:cNvPr id="59" name="Encoder-RowArrow">
-            <a:extLst>
-              <a:ext uri="{FF2B5EF4-FFF2-40B4-BE49-F238E27FC236}">
-                <a16:creationId xmlns:a16="http://schemas.microsoft.com/office/drawing/2014/main" id="{203AA6C6-CCF9-B547-B4D0-D47B9D3DBA11}"/>
-              </a:ext>
-            </a:extLst>
-          </p:cNvPr>
-          <p:cNvCxnSpPr/>
-          <p:nvPr/>
-        </p:nvCxnSpPr>
-        <p:spPr>
-          <a:xfrm>
-            <a:off x="3683000" y="2908300"/>
-            <a:ext cx="266700" cy="0"/>
-          </a:xfrm>
-          <a:prstGeom prst="line">
-            <a:avLst/>
-          </a:prstGeom>
-          <a:ln w="22860">
-            <a:solidFill>
-              <a:srgbClr val="52657A"/>
-            </a:solidFill>
-            <a:tailEnd type="triangle"/>
-          </a:ln>
-        </p:spPr>
-        <p:style>
-          <a:lnRef idx="2">
-            <a:schemeClr val="accent1"/>
-          </a:lnRef>
-          <a:fillRef idx="0">
-            <a:schemeClr val="accent1"/>
-          </a:fillRef>
-          <a:effectRef idx="1">
-            <a:schemeClr val="accent1"/>
-          </a:effectRef>
-          <a:fontRef idx="minor">
-            <a:schemeClr val="tx1"/>
-          </a:fontRef>
-        </p:style>
-      </p:cxnSp>
-      <p:sp>
-        <p:nvSpPr>
-          <p:cNvPr id="60" name="Encoder-Token-0">
-            <a:extLst>
-              <a:ext uri="{FF2B5EF4-FFF2-40B4-BE49-F238E27FC236}">
-                <a16:creationId xmlns:a16="http://schemas.microsoft.com/office/drawing/2014/main" id="{5F27F3B1-BA45-3A24-266F-32CBE03DD6EB}"/>
-              </a:ext>
-            </a:extLst>
-          </p:cNvPr>
-          <p:cNvSpPr/>
-          <p:nvPr/>
-        </p:nvSpPr>
-        <p:spPr>
-          <a:xfrm>
-            <a:off x="4013200" y="2667000"/>
-            <a:ext cx="101600" cy="482600"/>
-          </a:xfrm>
-          <a:prstGeom prst="roundRect">
-            <a:avLst/>
-          </a:prstGeom>
-          <a:solidFill>
-            <a:srgbClr val="2A9D8F"/>
-          </a:solidFill>
-          <a:ln w="12700">
-            <a:solidFill>
-              <a:srgbClr val="2A9D8F"/>
-            </a:solidFill>
-          </a:ln>
-        </p:spPr>
-        <p:style>
-          <a:lnRef idx="2">
-            <a:schemeClr val="accent1">
-              <a:shade val="15000"/>
-            </a:schemeClr>
-          </a:lnRef>
-          <a:fillRef idx="1">
-            <a:schemeClr val="accent1"/>
-          </a:fillRef>
-          <a:effectRef idx="0">
-            <a:schemeClr val="accent1"/>
-          </a:effectRef>
-          <a:fontRef idx="minor">
-            <a:schemeClr val="lt1"/>
-          </a:fontRef>
-        </p:style>
-        <p:txBody>
-          <a:bodyPr rtlCol="0" anchor="ctr"/>
-          <a:lstStyle/>
-          <a:p>
-            <a:pPr algn="ctr"/>
-            <a:endParaRPr lang="en-US"/>
-          </a:p>
-        </p:txBody>
-      </p:sp>
-      <p:sp>
-        <p:nvSpPr>
-          <p:cNvPr id="61" name="Encoder-Token-1">
-            <a:extLst>
-              <a:ext uri="{FF2B5EF4-FFF2-40B4-BE49-F238E27FC236}">
-                <a16:creationId xmlns:a16="http://schemas.microsoft.com/office/drawing/2014/main" id="{B61EAA60-2FB5-1FC5-ECA0-A28C6343F3C2}"/>
-              </a:ext>
-            </a:extLst>
-          </p:cNvPr>
-          <p:cNvSpPr/>
-          <p:nvPr/>
-        </p:nvSpPr>
-        <p:spPr>
-          <a:xfrm>
-            <a:off x="4165600" y="2667000"/>
-            <a:ext cx="101600" cy="482600"/>
-          </a:xfrm>
-          <a:prstGeom prst="roundRect">
-            <a:avLst/>
-          </a:prstGeom>
-          <a:solidFill>
-            <a:srgbClr val="E76F51"/>
-          </a:solidFill>
-          <a:ln w="12700">
-            <a:solidFill>
-              <a:srgbClr val="E76F51"/>
-            </a:solidFill>
-          </a:ln>
-        </p:spPr>
-        <p:style>
-          <a:lnRef idx="2">
-            <a:schemeClr val="accent1">
-              <a:shade val="15000"/>
-            </a:schemeClr>
-          </a:lnRef>
-          <a:fillRef idx="1">
-            <a:schemeClr val="accent1"/>
-          </a:fillRef>
-          <a:effectRef idx="0">
-            <a:schemeClr val="accent1"/>
-          </a:effectRef>
-          <a:fontRef idx="minor">
-            <a:schemeClr val="lt1"/>
-          </a:fontRef>
-        </p:style>
-        <p:txBody>
-          <a:bodyPr rtlCol="0" anchor="ctr"/>
-          <a:lstStyle/>
-          <a:p>
-            <a:pPr algn="ctr"/>
-            <a:endParaRPr lang="en-US"/>
-          </a:p>
-        </p:txBody>
-      </p:sp>
-      <p:sp>
-        <p:nvSpPr>
-          <p:cNvPr id="62" name="Encoder-Token-2">
-            <a:extLst>
-              <a:ext uri="{FF2B5EF4-FFF2-40B4-BE49-F238E27FC236}">
-                <a16:creationId xmlns:a16="http://schemas.microsoft.com/office/drawing/2014/main" id="{1842053C-7CC3-E3C5-7811-9928443EBB20}"/>
-              </a:ext>
-            </a:extLst>
-          </p:cNvPr>
-          <p:cNvSpPr/>
-          <p:nvPr/>
-        </p:nvSpPr>
-        <p:spPr>
-          <a:xfrm>
-            <a:off x="4318000" y="2667000"/>
-            <a:ext cx="101600" cy="482600"/>
-          </a:xfrm>
-          <a:prstGeom prst="roundRect">
-            <a:avLst/>
-          </a:prstGeom>
-          <a:solidFill>
-            <a:srgbClr val="2A9D8F"/>
-          </a:solidFill>
-          <a:ln w="12700">
-            <a:solidFill>
-              <a:srgbClr val="2A9D8F"/>
-            </a:solidFill>
-          </a:ln>
-        </p:spPr>
-        <p:style>
-          <a:lnRef idx="2">
-            <a:schemeClr val="accent1">
-              <a:shade val="15000"/>
-            </a:schemeClr>
-          </a:lnRef>
-          <a:fillRef idx="1">
-            <a:schemeClr val="accent1"/>
-          </a:fillRef>
-          <a:effectRef idx="0">
-            <a:schemeClr val="accent1"/>
-          </a:effectRef>
-          <a:fontRef idx="minor">
-            <a:schemeClr val="lt1"/>
-          </a:fontRef>
-        </p:style>
-        <p:txBody>
-          <a:bodyPr rtlCol="0" anchor="ctr"/>
-          <a:lstStyle/>
-          <a:p>
-            <a:pPr algn="ctr"/>
-            <a:endParaRPr lang="en-US"/>
-          </a:p>
-        </p:txBody>
-      </p:sp>
-      <p:sp>
-        <p:nvSpPr>
-          <p:cNvPr id="63" name="Encoder-Caption">
-            <a:extLst>
-              <a:ext uri="{FF2B5EF4-FFF2-40B4-BE49-F238E27FC236}">
-                <a16:creationId xmlns:a16="http://schemas.microsoft.com/office/drawing/2014/main" id="{921A04D1-5EE7-A32F-5554-FD5C508C8CF7}"/>
+          <p:cNvPr id="64" name="LLM-Title">
+            <a:extLst>
+              <a:ext uri="{FF2B5EF4-FFF2-40B4-BE49-F238E27FC236}">
+                <a16:creationId xmlns:a16="http://schemas.microsoft.com/office/drawing/2014/main" id="{C400F7A6-ED6F-903E-5A34-A7598377B3CE}"/>
               </a:ext>
             </a:extLst>
           </p:cNvPr>
@@ -10800,8 +9010,8 @@
         </p:nvSpPr>
         <p:spPr>
           <a:xfrm>
-            <a:off x="2794000" y="3352800"/>
-            <a:ext cx="1803400" cy="482600"/>
+            <a:off x="5295900" y="2136140"/>
+            <a:ext cx="1447800" cy="571500"/>
           </a:xfrm>
           <a:prstGeom prst="rect">
             <a:avLst/>
@@ -10816,48 +9026,7 @@
           <a:p>
             <a:pPr algn="ctr"/>
             <a:r>
-              <a:rPr lang="en-US" sz="1400" b="1">
-                <a:solidFill>
-                  <a:srgbClr val="E76F51"/>
-                </a:solidFill>
-                <a:latin typeface="Aptos" panose="020B0004020202020204" pitchFamily="34" charset="0"/>
-              </a:rPr>
-              <a:t>One row → one graph token</a:t>
-            </a:r>
-          </a:p>
-        </p:txBody>
-      </p:sp>
-      <p:sp>
-        <p:nvSpPr>
-          <p:cNvPr id="64" name="LLM-Title">
-            <a:extLst>
-              <a:ext uri="{FF2B5EF4-FFF2-40B4-BE49-F238E27FC236}">
-                <a16:creationId xmlns:a16="http://schemas.microsoft.com/office/drawing/2014/main" id="{C400F7A6-ED6F-903E-5A34-A7598377B3CE}"/>
-              </a:ext>
-            </a:extLst>
-          </p:cNvPr>
-          <p:cNvSpPr txBox="1"/>
-          <p:nvPr/>
-        </p:nvSpPr>
-        <p:spPr>
-          <a:xfrm>
-            <a:off x="5295900" y="1905000"/>
-            <a:ext cx="1447800" cy="571500"/>
-          </a:xfrm>
-          <a:prstGeom prst="rect">
-            <a:avLst/>
-          </a:prstGeom>
-          <a:noFill/>
-        </p:spPr>
-        <p:txBody>
-          <a:bodyPr vert="horz" wrap="square" lIns="0" tIns="0" rIns="0" bIns="0" rtlCol="0" anchor="ctr">
-            <a:noAutofit/>
-          </a:bodyPr>
-          <a:lstStyle/>
-          <a:p>
-            <a:pPr algn="ctr"/>
-            <a:r>
-              <a:rPr lang="en-US" b="1">
+              <a:rPr lang="en-US" b="1" dirty="0">
                 <a:solidFill>
                   <a:srgbClr val="172B4D"/>
                 </a:solidFill>
@@ -10871,70 +9040,6 @@
       </p:sp>
       <p:sp>
         <p:nvSpPr>
-          <p:cNvPr id="65" name="LLM-Core">
-            <a:extLst>
-              <a:ext uri="{FF2B5EF4-FFF2-40B4-BE49-F238E27FC236}">
-                <a16:creationId xmlns:a16="http://schemas.microsoft.com/office/drawing/2014/main" id="{728624C5-0658-22AF-2CF3-0FE05578DE09}"/>
-              </a:ext>
-            </a:extLst>
-          </p:cNvPr>
-          <p:cNvSpPr/>
-          <p:nvPr/>
-        </p:nvSpPr>
-        <p:spPr>
-          <a:xfrm>
-            <a:off x="5461000" y="2565400"/>
-            <a:ext cx="1117600" cy="698500"/>
-          </a:xfrm>
-          <a:prstGeom prst="roundRect">
-            <a:avLst/>
-          </a:prstGeom>
-          <a:solidFill>
-            <a:srgbClr val="5B5BD6"/>
-          </a:solidFill>
-          <a:ln w="12700">
-            <a:solidFill>
-              <a:srgbClr val="5B5BD6"/>
-            </a:solidFill>
-          </a:ln>
-        </p:spPr>
-        <p:style>
-          <a:lnRef idx="2">
-            <a:schemeClr val="accent1">
-              <a:shade val="15000"/>
-            </a:schemeClr>
-          </a:lnRef>
-          <a:fillRef idx="1">
-            <a:schemeClr val="accent1"/>
-          </a:fillRef>
-          <a:effectRef idx="0">
-            <a:schemeClr val="accent1"/>
-          </a:effectRef>
-          <a:fontRef idx="minor">
-            <a:schemeClr val="lt1"/>
-          </a:fontRef>
-        </p:style>
-        <p:txBody>
-          <a:bodyPr wrap="square" lIns="50800" tIns="12700" rIns="50800" bIns="12700" rtlCol="0" anchor="ctr">
-            <a:noAutofit/>
-          </a:bodyPr>
-          <a:lstStyle/>
-          <a:p>
-            <a:pPr algn="ctr"/>
-            <a:r>
-              <a:rPr lang="en-US" sz="2400" b="1">
-                <a:solidFill>
-                  <a:srgbClr val="FFFFFF"/>
-                </a:solidFill>
-                <a:latin typeface="Aptos" panose="020B0004020202020204" pitchFamily="34" charset="0"/>
-              </a:rPr>
-              <a:t>LLM</a:t>
-            </a:r>
-          </a:p>
-        </p:txBody>
-      </p:sp>
-      <p:sp>
-        <p:nvSpPr>
           <p:cNvPr id="66" name="LLM-Caption">
             <a:extLst>
               <a:ext uri="{FF2B5EF4-FFF2-40B4-BE49-F238E27FC236}">
@@ -10947,7 +9052,7 @@
         </p:nvSpPr>
         <p:spPr>
           <a:xfrm>
-            <a:off x="5283200" y="3352800"/>
+            <a:off x="5295900" y="3086099"/>
             <a:ext cx="1473200" cy="508000"/>
           </a:xfrm>
           <a:prstGeom prst="rect">
@@ -10963,7 +9068,7 @@
           <a:p>
             <a:pPr algn="ctr"/>
             <a:r>
-              <a:rPr lang="en-US" sz="1400" b="1">
+              <a:rPr lang="en-US" sz="1400" b="1" dirty="0">
                 <a:solidFill>
                   <a:srgbClr val="5B5BD6"/>
                 </a:solidFill>
@@ -11004,167 +9109,18 @@
           <a:p>
             <a:pPr algn="ctr"/>
             <a:r>
-              <a:rPr lang="en-US" b="1">
+              <a:rPr lang="en-US" b="1" dirty="0">
                 <a:solidFill>
                   <a:srgbClr val="172B4D"/>
                 </a:solidFill>
                 <a:latin typeface="Aptos" panose="020B0004020202020204" pitchFamily="34" charset="0"/>
               </a:rPr>
-              <a:t>Our graph
+              <a:t>Graph
 decoder</a:t>
             </a:r>
           </a:p>
         </p:txBody>
       </p:sp>
-      <p:sp>
-        <p:nvSpPr>
-          <p:cNvPr id="68" name="Decoder-Node-1">
-            <a:extLst>
-              <a:ext uri="{FF2B5EF4-FFF2-40B4-BE49-F238E27FC236}">
-                <a16:creationId xmlns:a16="http://schemas.microsoft.com/office/drawing/2014/main" id="{86A32EFA-6319-4730-05B8-A6F790BE0847}"/>
-              </a:ext>
-            </a:extLst>
-          </p:cNvPr>
-          <p:cNvSpPr/>
-          <p:nvPr/>
-        </p:nvSpPr>
-        <p:spPr>
-          <a:xfrm>
-            <a:off x="7823200" y="2667000"/>
-            <a:ext cx="304800" cy="304800"/>
-          </a:xfrm>
-          <a:prstGeom prst="ellipse">
-            <a:avLst/>
-          </a:prstGeom>
-          <a:solidFill>
-            <a:srgbClr val="E5F5F2"/>
-          </a:solidFill>
-          <a:ln>
-            <a:solidFill>
-              <a:srgbClr val="2A9D8F"/>
-            </a:solidFill>
-          </a:ln>
-        </p:spPr>
-        <p:style>
-          <a:lnRef idx="2">
-            <a:schemeClr val="accent1">
-              <a:shade val="15000"/>
-            </a:schemeClr>
-          </a:lnRef>
-          <a:fillRef idx="1">
-            <a:schemeClr val="accent1"/>
-          </a:fillRef>
-          <a:effectRef idx="0">
-            <a:schemeClr val="accent1"/>
-          </a:effectRef>
-          <a:fontRef idx="minor">
-            <a:schemeClr val="lt1"/>
-          </a:fontRef>
-        </p:style>
-        <p:txBody>
-          <a:bodyPr rtlCol="0" anchor="ctr"/>
-          <a:lstStyle/>
-          <a:p>
-            <a:pPr algn="ctr"/>
-            <a:endParaRPr lang="en-US"/>
-          </a:p>
-        </p:txBody>
-      </p:sp>
-      <p:sp>
-        <p:nvSpPr>
-          <p:cNvPr id="69" name="Decoder-Node-2">
-            <a:extLst>
-              <a:ext uri="{FF2B5EF4-FFF2-40B4-BE49-F238E27FC236}">
-                <a16:creationId xmlns:a16="http://schemas.microsoft.com/office/drawing/2014/main" id="{12E3C200-DF54-E13C-143E-BBAC5AFC9154}"/>
-              </a:ext>
-            </a:extLst>
-          </p:cNvPr>
-          <p:cNvSpPr/>
-          <p:nvPr/>
-        </p:nvSpPr>
-        <p:spPr>
-          <a:xfrm>
-            <a:off x="8648700" y="2667000"/>
-            <a:ext cx="304800" cy="304800"/>
-          </a:xfrm>
-          <a:prstGeom prst="ellipse">
-            <a:avLst/>
-          </a:prstGeom>
-          <a:solidFill>
-            <a:srgbClr val="E5F5F2"/>
-          </a:solidFill>
-          <a:ln>
-            <a:solidFill>
-              <a:srgbClr val="2A9D8F"/>
-            </a:solidFill>
-          </a:ln>
-        </p:spPr>
-        <p:style>
-          <a:lnRef idx="2">
-            <a:schemeClr val="accent1">
-              <a:shade val="15000"/>
-            </a:schemeClr>
-          </a:lnRef>
-          <a:fillRef idx="1">
-            <a:schemeClr val="accent1"/>
-          </a:fillRef>
-          <a:effectRef idx="0">
-            <a:schemeClr val="accent1"/>
-          </a:effectRef>
-          <a:fontRef idx="minor">
-            <a:schemeClr val="lt1"/>
-          </a:fontRef>
-        </p:style>
-        <p:txBody>
-          <a:bodyPr rtlCol="0" anchor="ctr"/>
-          <a:lstStyle/>
-          <a:p>
-            <a:pPr algn="ctr"/>
-            <a:endParaRPr lang="en-US"/>
-          </a:p>
-        </p:txBody>
-      </p:sp>
-      <p:cxnSp>
-        <p:nvCxnSpPr>
-          <p:cNvPr id="70" name="Decoder-Link">
-            <a:extLst>
-              <a:ext uri="{FF2B5EF4-FFF2-40B4-BE49-F238E27FC236}">
-                <a16:creationId xmlns:a16="http://schemas.microsoft.com/office/drawing/2014/main" id="{294F1D3B-898B-13E7-FAED-C50A988C41A2}"/>
-              </a:ext>
-            </a:extLst>
-          </p:cNvPr>
-          <p:cNvCxnSpPr/>
-          <p:nvPr/>
-        </p:nvCxnSpPr>
-        <p:spPr>
-          <a:xfrm>
-            <a:off x="8128000" y="2819400"/>
-            <a:ext cx="520700" cy="0"/>
-          </a:xfrm>
-          <a:prstGeom prst="line">
-            <a:avLst/>
-          </a:prstGeom>
-          <a:ln w="38100">
-            <a:solidFill>
-              <a:srgbClr val="2E8B57"/>
-            </a:solidFill>
-          </a:ln>
-        </p:spPr>
-        <p:style>
-          <a:lnRef idx="2">
-            <a:schemeClr val="accent1"/>
-          </a:lnRef>
-          <a:fillRef idx="0">
-            <a:schemeClr val="accent1"/>
-          </a:fillRef>
-          <a:effectRef idx="1">
-            <a:schemeClr val="accent1"/>
-          </a:effectRef>
-          <a:fontRef idx="minor">
-            <a:schemeClr val="tx1"/>
-          </a:fontRef>
-        </p:style>
-      </p:cxnSp>
       <p:sp>
         <p:nvSpPr>
           <p:cNvPr id="71" name="Decoder-Caption">
@@ -11807,112 +9763,6 @@
       </p:sp>
       <p:sp>
         <p:nvSpPr>
-          <p:cNvPr id="85" name="Attention-Band">
-            <a:extLst>
-              <a:ext uri="{FF2B5EF4-FFF2-40B4-BE49-F238E27FC236}">
-                <a16:creationId xmlns:a16="http://schemas.microsoft.com/office/drawing/2014/main" id="{D4AA52FA-CE8F-7561-474E-1D33666B0EF9}"/>
-              </a:ext>
-            </a:extLst>
-          </p:cNvPr>
-          <p:cNvSpPr/>
-          <p:nvPr/>
-        </p:nvSpPr>
-        <p:spPr>
-          <a:xfrm>
-            <a:off x="2743200" y="4013200"/>
-            <a:ext cx="4140200" cy="482600"/>
-          </a:xfrm>
-          <a:prstGeom prst="roundRect">
-            <a:avLst/>
-          </a:prstGeom>
-          <a:solidFill>
-            <a:srgbClr val="E5F5F2"/>
-          </a:solidFill>
-          <a:ln w="12700">
-            <a:solidFill>
-              <a:srgbClr val="E5F5F2"/>
-            </a:solidFill>
-          </a:ln>
-        </p:spPr>
-        <p:style>
-          <a:lnRef idx="2">
-            <a:schemeClr val="accent1">
-              <a:shade val="15000"/>
-            </a:schemeClr>
-          </a:lnRef>
-          <a:fillRef idx="1">
-            <a:schemeClr val="accent1"/>
-          </a:fillRef>
-          <a:effectRef idx="0">
-            <a:schemeClr val="accent1"/>
-          </a:effectRef>
-          <a:fontRef idx="minor">
-            <a:schemeClr val="lt1"/>
-          </a:fontRef>
-        </p:style>
-        <p:txBody>
-          <a:bodyPr wrap="square" lIns="50800" tIns="12700" rIns="50800" bIns="12700" rtlCol="0" anchor="ctr">
-            <a:noAutofit/>
-          </a:bodyPr>
-          <a:lstStyle/>
-          <a:p>
-            <a:pPr algn="ctr"/>
-            <a:r>
-              <a:rPr lang="en-US" sz="1400" b="1">
-                <a:solidFill>
-                  <a:srgbClr val="2A9D8F"/>
-                </a:solidFill>
-                <a:latin typeface="Aptos" panose="020B0004020202020204" pitchFamily="34" charset="0"/>
-              </a:rPr>
-              <a:t>Input links also guide what the LLM pays attention to.</a:t>
-            </a:r>
-          </a:p>
-        </p:txBody>
-      </p:sp>
-      <p:cxnSp>
-        <p:nvCxnSpPr>
-          <p:cNvPr id="86" name="Attention-Arrow">
-            <a:extLst>
-              <a:ext uri="{FF2B5EF4-FFF2-40B4-BE49-F238E27FC236}">
-                <a16:creationId xmlns:a16="http://schemas.microsoft.com/office/drawing/2014/main" id="{7971C400-00B3-BA23-B97D-B88A28D69FDC}"/>
-              </a:ext>
-            </a:extLst>
-          </p:cNvPr>
-          <p:cNvCxnSpPr/>
-          <p:nvPr/>
-        </p:nvCxnSpPr>
-        <p:spPr>
-          <a:xfrm flipV="1">
-            <a:off x="6019800" y="3860800"/>
-            <a:ext cx="0" cy="152400"/>
-          </a:xfrm>
-          <a:prstGeom prst="line">
-            <a:avLst/>
-          </a:prstGeom>
-          <a:ln w="22860">
-            <a:solidFill>
-              <a:srgbClr val="2A9D8F"/>
-            </a:solidFill>
-            <a:tailEnd type="triangle"/>
-          </a:ln>
-        </p:spPr>
-        <p:style>
-          <a:lnRef idx="2">
-            <a:schemeClr val="accent1"/>
-          </a:lnRef>
-          <a:fillRef idx="0">
-            <a:schemeClr val="accent1"/>
-          </a:fillRef>
-          <a:effectRef idx="1">
-            <a:schemeClr val="accent1"/>
-          </a:effectRef>
-          <a:fontRef idx="minor">
-            <a:schemeClr val="tx1"/>
-          </a:fontRef>
-        </p:style>
-      </p:cxnSp>
-      <p:sp>
-        <p:nvSpPr>
           <p:cNvPr id="87" name="Difference-0">
             <a:extLst>
               <a:ext uri="{FF2B5EF4-FFF2-40B4-BE49-F238E27FC236}">
@@ -12618,13 +10468,31 @@
           <a:lstStyle/>
           <a:p>
             <a:r>
-              <a:rPr lang="en-US" sz="1400" b="1">
+              <a:rPr lang="en-US" sz="1400" b="1" dirty="0">
                 <a:solidFill>
                   <a:srgbClr val="172B4D"/>
                 </a:solidFill>
                 <a:latin typeface="Aptos" panose="020B0004020202020204" pitchFamily="34" charset="0"/>
               </a:rPr>
-              <a:t>Normal patient network → tumour network → changed links and genes.</a:t>
+              <a:t>Normal patient network → </a:t>
+            </a:r>
+            <a:r>
+              <a:rPr lang="en-US" sz="1400" b="1" dirty="0" err="1">
+                <a:solidFill>
+                  <a:srgbClr val="172B4D"/>
+                </a:solidFill>
+                <a:latin typeface="Aptos" panose="020B0004020202020204" pitchFamily="34" charset="0"/>
+              </a:rPr>
+              <a:t>tumour</a:t>
+            </a:r>
+            <a:r>
+              <a:rPr lang="en-US" sz="1400" b="1" dirty="0">
+                <a:solidFill>
+                  <a:srgbClr val="172B4D"/>
+                </a:solidFill>
+                <a:latin typeface="Aptos" panose="020B0004020202020204" pitchFamily="34" charset="0"/>
+              </a:rPr>
+              <a:t> network → changed links and genes.</a:t>
             </a:r>
           </a:p>
         </p:txBody>
